--- a/reports/presentacion_final.pptx
+++ b/reports/presentacion_final.pptx
@@ -20,6 +20,19 @@
     <p:sldId id="268" r:id="rId19"/>
     <p:sldId id="269" r:id="rId20"/>
     <p:sldId id="270" r:id="rId21"/>
+    <p:sldId id="271" r:id="rId22"/>
+    <p:sldId id="272" r:id="rId23"/>
+    <p:sldId id="273" r:id="rId24"/>
+    <p:sldId id="274" r:id="rId25"/>
+    <p:sldId id="275" r:id="rId26"/>
+    <p:sldId id="276" r:id="rId27"/>
+    <p:sldId id="277" r:id="rId28"/>
+    <p:sldId id="278" r:id="rId29"/>
+    <p:sldId id="279" r:id="rId30"/>
+    <p:sldId id="280" r:id="rId31"/>
+    <p:sldId id="281" r:id="rId32"/>
+    <p:sldId id="282" r:id="rId33"/>
+    <p:sldId id="283" r:id="rId34"/>
   </p:sldIdLst>
   <p:sldSz cx="12191695" cy="6858000" type="screen4x3"/>
   <p:notesSz cx="6858000" cy="9144000"/>
@@ -3268,7 +3281,7 @@
                 </a:solidFill>
                 <a:latin typeface="Calibri"/>
               </a:rPr>
-              <a:t>PROYECTO 2 · ANÁLISIS EXPLORATORIO</a:t>
+              <a:t>PROYECTO 2 · RESULTADOS</a:t>
             </a:r>
           </a:p>
         </p:txBody>
@@ -3536,7 +3549,7 @@
                 </a:solidFill>
                 <a:latin typeface="Calibri"/>
               </a:rPr>
-              <a:t>6 de septiembre de 2026</a:t>
+              <a:t>19 de octubre de 2026</a:t>
             </a:r>
           </a:p>
         </p:txBody>
@@ -5114,7 +5127,7 @@
                 </a:solidFill>
                 <a:latin typeface="Calibri"/>
               </a:rPr>
-              <a:t>CONCLUSIONES</a:t>
+              <a:t>DEL EDA AL MODELADO</a:t>
             </a:r>
           </a:p>
         </p:txBody>
@@ -5153,7 +5166,7 @@
                 </a:solidFill>
                 <a:latin typeface="Calibri"/>
               </a:rPr>
-              <a:t>Próximos pasos para el modelado</a:t>
+              <a:t>Cada hallazgo se convirtió en una decisión</a:t>
             </a:r>
           </a:p>
         </p:txBody>
@@ -5195,7 +5208,7 @@
                 </a:solidFill>
                 <a:latin typeface="Calibri"/>
               </a:rPr>
-              <a:t>›  Tratar landmarks faltantes con forward-fill, no interpolación ni ceros.</a:t>
+              <a:t>›  Landmarks faltantes → forward-fill dentro de la secuencia y máscara de detección de cada mano como entrada.</a:t>
             </a:r>
           </a:p>
           <a:p>
@@ -5214,7 +5227,7 @@
                 </a:solidFill>
                 <a:latin typeface="Calibri"/>
               </a:rPr>
-              <a:t>›  Descartar las 468 columnas de rostro: aportan poco y encarecen el procesamiento.</a:t>
+              <a:t>›  Rostro con poca información → se usan solo manos (centradas en la muñeca) y pose: 227 valores por cuadro.</a:t>
             </a:r>
           </a:p>
           <a:p>
@@ -5233,7 +5246,7 @@
                 </a:solidFill>
                 <a:latin typeface="Calibri"/>
               </a:rPr>
-              <a:t>›  Separar entrenamiento y validación por participante, no al azar.</a:t>
+              <a:t>›  Participantes desbalanceados → split por participante: quienes están en prueba nunca se vieron al entrenar.</a:t>
             </a:r>
           </a:p>
           <a:p>
@@ -5252,7 +5265,7 @@
                 </a:solidFill>
                 <a:latin typeface="Calibri"/>
               </a:rPr>
-              <a:t>›  Aceptar longitud de secuencia variable (recorte o relleno).</a:t>
+              <a:t>›  Secuencias de longitud variable (mediana 147, cola ~750) → recorte a 384 cuadros y reducción temporal en el modelo.</a:t>
             </a:r>
           </a:p>
           <a:p>
@@ -5271,7 +5284,7 @@
                 </a:solidFill>
                 <a:latin typeface="Calibri"/>
               </a:rPr>
-              <a:t>›  Reportar desempeño por carácter, no solo en promedio.</a:t>
+              <a:t>›  Caracteres desbalanceados → el desempeño se reporta también por carácter.</a:t>
             </a:r>
           </a:p>
         </p:txBody>
@@ -5348,6 +5361,312 @@
             <a:avLst/>
           </a:prstGeom>
           <a:solidFill>
+            <a:srgbClr val="172A45"/>
+          </a:solidFill>
+          <a:ln>
+            <a:noFill/>
+          </a:ln>
+          <a:effectLst/>
+        </p:spPr>
+        <p:style>
+          <a:lnRef idx="1">
+            <a:schemeClr val="accent1"/>
+          </a:lnRef>
+          <a:fillRef idx="3">
+            <a:schemeClr val="accent1"/>
+          </a:fillRef>
+          <a:effectRef idx="2">
+            <a:schemeClr val="accent1"/>
+          </a:effectRef>
+          <a:fontRef idx="minor">
+            <a:schemeClr val="lt1"/>
+          </a:fontRef>
+        </p:style>
+        <p:txBody>
+          <a:bodyPr rtlCol="0" anchor="ctr"/>
+          <a:lstStyle/>
+          <a:p>
+            <a:pPr algn="ctr"/>
+          </a:p>
+        </p:txBody>
+      </p:sp>
+      <p:sp>
+        <p:nvSpPr>
+          <p:cNvPr id="3" name="Rectangle 2"/>
+          <p:cNvSpPr/>
+          <p:nvPr/>
+        </p:nvSpPr>
+        <p:spPr>
+          <a:xfrm>
+            <a:off x="0" y="0"/>
+            <a:ext cx="256032" cy="6858000"/>
+          </a:xfrm>
+          <a:prstGeom prst="rect">
+            <a:avLst/>
+          </a:prstGeom>
+          <a:solidFill>
+            <a:srgbClr val="F28C28"/>
+          </a:solidFill>
+          <a:ln>
+            <a:noFill/>
+          </a:ln>
+          <a:effectLst/>
+        </p:spPr>
+        <p:style>
+          <a:lnRef idx="1">
+            <a:schemeClr val="accent1"/>
+          </a:lnRef>
+          <a:fillRef idx="3">
+            <a:schemeClr val="accent1"/>
+          </a:fillRef>
+          <a:effectRef idx="2">
+            <a:schemeClr val="accent1"/>
+          </a:effectRef>
+          <a:fontRef idx="minor">
+            <a:schemeClr val="lt1"/>
+          </a:fontRef>
+        </p:style>
+        <p:txBody>
+          <a:bodyPr rtlCol="0" anchor="ctr"/>
+          <a:lstStyle/>
+          <a:p>
+            <a:pPr algn="ctr"/>
+          </a:p>
+        </p:txBody>
+      </p:sp>
+      <p:sp>
+        <p:nvSpPr>
+          <p:cNvPr id="4" name="TextBox 3"/>
+          <p:cNvSpPr txBox="1"/>
+          <p:nvPr/>
+        </p:nvSpPr>
+        <p:spPr>
+          <a:xfrm>
+            <a:off x="822960" y="2286000"/>
+            <a:ext cx="2743200" cy="1188720"/>
+          </a:xfrm>
+          <a:prstGeom prst="rect">
+            <a:avLst/>
+          </a:prstGeom>
+          <a:noFill/>
+        </p:spPr>
+        <p:txBody>
+          <a:bodyPr wrap="square" anchor="t" lIns="0" rIns="0" tIns="0" bIns="0">
+            <a:spAutoFit/>
+          </a:bodyPr>
+          <a:lstStyle/>
+          <a:p>
+            <a:pPr algn="l">
+              <a:lnSpc>
+                <a:spcPct val="100000"/>
+              </a:lnSpc>
+            </a:pPr>
+            <a:r>
+              <a:rPr sz="6400" b="1" i="0">
+                <a:solidFill>
+                  <a:srgbClr val="2CA6A4"/>
+                </a:solidFill>
+                <a:latin typeface="Calibri"/>
+              </a:rPr>
+              <a:t/>
+            </a:r>
+          </a:p>
+        </p:txBody>
+      </p:sp>
+      <p:sp>
+        <p:nvSpPr>
+          <p:cNvPr id="5" name="TextBox 4"/>
+          <p:cNvSpPr txBox="1"/>
+          <p:nvPr/>
+        </p:nvSpPr>
+        <p:spPr>
+          <a:xfrm>
+            <a:off x="822960" y="3383280"/>
+            <a:ext cx="10058400" cy="1097280"/>
+          </a:xfrm>
+          <a:prstGeom prst="rect">
+            <a:avLst/>
+          </a:prstGeom>
+          <a:noFill/>
+        </p:spPr>
+        <p:txBody>
+          <a:bodyPr wrap="square" anchor="t" lIns="0" rIns="0" tIns="0" bIns="0">
+            <a:spAutoFit/>
+          </a:bodyPr>
+          <a:lstStyle/>
+          <a:p>
+            <a:pPr algn="l">
+              <a:lnSpc>
+                <a:spcPct val="100000"/>
+              </a:lnSpc>
+            </a:pPr>
+            <a:r>
+              <a:rPr sz="3400" b="1" i="0">
+                <a:solidFill>
+                  <a:srgbClr val="FFFFFF"/>
+                </a:solidFill>
+                <a:latin typeface="Calibri"/>
+              </a:rPr>
+              <a:t>Modelado</a:t>
+            </a:r>
+          </a:p>
+        </p:txBody>
+      </p:sp>
+      <p:sp>
+        <p:nvSpPr>
+          <p:cNvPr id="6" name="TextBox 5"/>
+          <p:cNvSpPr txBox="1"/>
+          <p:nvPr/>
+        </p:nvSpPr>
+        <p:spPr>
+          <a:xfrm>
+            <a:off x="822960" y="4206240"/>
+            <a:ext cx="9601200" cy="731520"/>
+          </a:xfrm>
+          <a:prstGeom prst="rect">
+            <a:avLst/>
+          </a:prstGeom>
+          <a:noFill/>
+        </p:spPr>
+        <p:txBody>
+          <a:bodyPr wrap="square" anchor="t" lIns="0" rIns="0" tIns="0" bIns="0">
+            <a:spAutoFit/>
+          </a:bodyPr>
+          <a:lstStyle/>
+          <a:p>
+            <a:pPr algn="l">
+              <a:lnSpc>
+                <a:spcPct val="100000"/>
+              </a:lnSpc>
+            </a:pPr>
+            <a:r>
+              <a:rPr sz="1600" b="0" i="0">
+                <a:solidFill>
+                  <a:srgbClr val="B8C4D0"/>
+                </a:solidFill>
+                <a:latin typeface="Calibri"/>
+              </a:rPr>
+              <a:t>Cuatro arquitecturas sobre la misma base de datos y entrenamiento</a:t>
+            </a:r>
+          </a:p>
+        </p:txBody>
+      </p:sp>
+      <p:sp>
+        <p:nvSpPr>
+          <p:cNvPr id="7" name="TextBox 6"/>
+          <p:cNvSpPr txBox="1"/>
+          <p:nvPr/>
+        </p:nvSpPr>
+        <p:spPr>
+          <a:xfrm>
+            <a:off x="11551615" y="6446520"/>
+            <a:ext cx="457200" cy="320040"/>
+          </a:xfrm>
+          <a:prstGeom prst="rect">
+            <a:avLst/>
+          </a:prstGeom>
+          <a:noFill/>
+        </p:spPr>
+        <p:txBody>
+          <a:bodyPr wrap="square" anchor="t" lIns="0" rIns="0" tIns="0" bIns="0">
+            <a:spAutoFit/>
+          </a:bodyPr>
+          <a:lstStyle/>
+          <a:p>
+            <a:pPr algn="r">
+              <a:lnSpc>
+                <a:spcPct val="100000"/>
+              </a:lnSpc>
+            </a:pPr>
+            <a:r>
+              <a:rPr sz="1100" b="0" i="0">
+                <a:solidFill>
+                  <a:srgbClr val="5B6B7C"/>
+                </a:solidFill>
+                <a:latin typeface="Calibri"/>
+              </a:rPr>
+              <a:t>15</a:t>
+            </a:r>
+          </a:p>
+        </p:txBody>
+      </p:sp>
+    </p:spTree>
+  </p:cSld>
+  <p:clrMapOvr>
+    <a:masterClrMapping/>
+  </p:clrMapOvr>
+</p:sld>
+</file>
+
+<file path=ppt/slides/slide16.xml><?xml version="1.0" encoding="utf-8"?>
+<p:sld xmlns:a="http://schemas.openxmlformats.org/drawingml/2006/main" xmlns:p="http://schemas.openxmlformats.org/presentationml/2006/main" xmlns:r="http://schemas.openxmlformats.org/officeDocument/2006/relationships">
+  <p:cSld>
+    <p:spTree>
+      <p:nvGrpSpPr>
+        <p:cNvPr id="1" name=""/>
+        <p:cNvGrpSpPr/>
+        <p:nvPr/>
+      </p:nvGrpSpPr>
+      <p:grpSpPr/>
+      <p:sp>
+        <p:nvSpPr>
+          <p:cNvPr id="2" name="Rectangle 1"/>
+          <p:cNvSpPr/>
+          <p:nvPr/>
+        </p:nvSpPr>
+        <p:spPr>
+          <a:xfrm>
+            <a:off x="0" y="0"/>
+            <a:ext cx="12191695" cy="6858000"/>
+          </a:xfrm>
+          <a:prstGeom prst="rect">
+            <a:avLst/>
+          </a:prstGeom>
+          <a:solidFill>
+            <a:srgbClr val="F6F8FA"/>
+          </a:solidFill>
+          <a:ln>
+            <a:noFill/>
+          </a:ln>
+          <a:effectLst/>
+        </p:spPr>
+        <p:style>
+          <a:lnRef idx="1">
+            <a:schemeClr val="accent1"/>
+          </a:lnRef>
+          <a:fillRef idx="3">
+            <a:schemeClr val="accent1"/>
+          </a:fillRef>
+          <a:effectRef idx="2">
+            <a:schemeClr val="accent1"/>
+          </a:effectRef>
+          <a:fontRef idx="minor">
+            <a:schemeClr val="lt1"/>
+          </a:fontRef>
+        </p:style>
+        <p:txBody>
+          <a:bodyPr rtlCol="0" anchor="ctr"/>
+          <a:lstStyle/>
+          <a:p>
+            <a:pPr algn="ctr"/>
+          </a:p>
+        </p:txBody>
+      </p:sp>
+      <p:sp>
+        <p:nvSpPr>
+          <p:cNvPr id="3" name="Rectangle 2"/>
+          <p:cNvSpPr/>
+          <p:nvPr/>
+        </p:nvSpPr>
+        <p:spPr>
+          <a:xfrm>
+            <a:off x="0" y="0"/>
+            <a:ext cx="12191695" cy="1234440"/>
+          </a:xfrm>
+          <a:prstGeom prst="rect">
+            <a:avLst/>
+          </a:prstGeom>
+          <a:solidFill>
             <a:srgbClr val="0F1E33"/>
           </a:solidFill>
           <a:ln>
@@ -5379,14 +5698,14 @@
       </p:sp>
       <p:sp>
         <p:nvSpPr>
-          <p:cNvPr id="3" name="Rectangle 2"/>
+          <p:cNvPr id="4" name="Rectangle 3"/>
           <p:cNvSpPr/>
           <p:nvPr/>
         </p:nvSpPr>
         <p:spPr>
           <a:xfrm>
-            <a:off x="0" y="0"/>
-            <a:ext cx="256032" cy="6858000"/>
+            <a:off x="548640" y="384048"/>
+            <a:ext cx="320040" cy="54864"/>
           </a:xfrm>
           <a:prstGeom prst="rect">
             <a:avLst/>
@@ -5423,14 +5742,14 @@
       </p:sp>
       <p:sp>
         <p:nvSpPr>
-          <p:cNvPr id="4" name="TextBox 3"/>
+          <p:cNvPr id="5" name="TextBox 4"/>
           <p:cNvSpPr txBox="1"/>
           <p:nvPr/>
         </p:nvSpPr>
         <p:spPr>
           <a:xfrm>
-            <a:off x="822960" y="2468880"/>
-            <a:ext cx="7315200" cy="1188720"/>
+            <a:off x="960120" y="274320"/>
+            <a:ext cx="8229600" cy="274320"/>
           </a:xfrm>
           <a:prstGeom prst="rect">
             <a:avLst/>
@@ -5449,27 +5768,27 @@
               </a:lnSpc>
             </a:pPr>
             <a:r>
-              <a:rPr sz="4800" b="1" i="0">
-                <a:solidFill>
-                  <a:srgbClr val="FFFFFF"/>
-                </a:solidFill>
-                <a:latin typeface="Calibri"/>
-              </a:rPr>
-              <a:t>Gracias</a:t>
-            </a:r>
-          </a:p>
-        </p:txBody>
-      </p:sp>
-      <p:sp>
-        <p:nvSpPr>
-          <p:cNvPr id="5" name="TextBox 4"/>
+              <a:rPr sz="1200" b="1" i="0">
+                <a:solidFill>
+                  <a:srgbClr val="2CA6A4"/>
+                </a:solidFill>
+                <a:latin typeface="Calibri"/>
+              </a:rPr>
+              <a:t>MODELADO</a:t>
+            </a:r>
+          </a:p>
+        </p:txBody>
+      </p:sp>
+      <p:sp>
+        <p:nvSpPr>
+          <p:cNvPr id="6" name="TextBox 5"/>
           <p:cNvSpPr txBox="1"/>
           <p:nvPr/>
         </p:nvSpPr>
         <p:spPr>
           <a:xfrm>
-            <a:off x="822960" y="3429000"/>
-            <a:ext cx="7315200" cy="548640"/>
+            <a:off x="548640" y="548640"/>
+            <a:ext cx="10515600" cy="640080"/>
           </a:xfrm>
           <a:prstGeom prst="rect">
             <a:avLst/>
@@ -5488,27 +5807,172 @@
               </a:lnSpc>
             </a:pPr>
             <a:r>
-              <a:rPr sz="1800" b="0" i="0">
-                <a:solidFill>
-                  <a:srgbClr val="B8C4D0"/>
-                </a:solidFill>
-                <a:latin typeface="Calibri"/>
-              </a:rPr>
-              <a:t>Preguntas y comentarios</a:t>
-            </a:r>
-          </a:p>
-        </p:txBody>
-      </p:sp>
-      <p:sp>
-        <p:nvSpPr>
-          <p:cNvPr id="6" name="TextBox 5"/>
+              <a:rPr sz="2500" b="1" i="0">
+                <a:solidFill>
+                  <a:srgbClr val="FFFFFF"/>
+                </a:solidFill>
+                <a:latin typeface="Calibri"/>
+              </a:rPr>
+              <a:t>Base común: misma entrada, mismo split, mismo entrenamiento</a:t>
+            </a:r>
+          </a:p>
+        </p:txBody>
+      </p:sp>
+      <p:sp>
+        <p:nvSpPr>
+          <p:cNvPr id="7" name="TextBox 6"/>
           <p:cNvSpPr txBox="1"/>
           <p:nvPr/>
         </p:nvSpPr>
         <p:spPr>
           <a:xfrm>
-            <a:off x="822960" y="6035040"/>
-            <a:ext cx="8229600" cy="365760"/>
+            <a:off x="640080" y="1645920"/>
+            <a:ext cx="5852160" cy="4572000"/>
+          </a:xfrm>
+          <a:prstGeom prst="rect">
+            <a:avLst/>
+          </a:prstGeom>
+          <a:noFill/>
+        </p:spPr>
+        <p:txBody>
+          <a:bodyPr wrap="square" lIns="0" rIns="0">
+            <a:spAutoFit/>
+          </a:bodyPr>
+          <a:lstStyle/>
+          <a:p>
+            <a:pPr>
+              <a:lnSpc>
+                <a:spcPct val="108000"/>
+              </a:lnSpc>
+              <a:spcAft>
+                <a:spcPts val="1600"/>
+              </a:spcAft>
+            </a:pPr>
+            <a:r>
+              <a:rPr sz="1650">
+                <a:solidFill>
+                  <a:srgbClr val="1B222D"/>
+                </a:solidFill>
+                <a:latin typeface="Calibri"/>
+              </a:rPr>
+              <a:t>›  Entrada: cada cuadro es un vector de 227 valores (manos y pose normalizadas + máscara de detección).</a:t>
+            </a:r>
+          </a:p>
+          <a:p>
+            <a:pPr>
+              <a:lnSpc>
+                <a:spcPct val="108000"/>
+              </a:lnSpc>
+              <a:spcAft>
+                <a:spcPts val="1600"/>
+              </a:spcAft>
+            </a:pPr>
+            <a:r>
+              <a:rPr sz="1650">
+                <a:solidFill>
+                  <a:srgbClr val="1B222D"/>
+                </a:solidFill>
+                <a:latin typeface="Calibri"/>
+              </a:rPr>
+              <a:t>›  Etiqueta: la frase completa. La pérdida CTC aprende sola la alineación cuadro-letra.</a:t>
+            </a:r>
+          </a:p>
+          <a:p>
+            <a:pPr>
+              <a:lnSpc>
+                <a:spcPct val="108000"/>
+              </a:lnSpc>
+              <a:spcAft>
+                <a:spcPts val="1600"/>
+              </a:spcAft>
+            </a:pPr>
+            <a:r>
+              <a:rPr sz="1650">
+                <a:solidFill>
+                  <a:srgbClr val="1B222D"/>
+                </a:solidFill>
+                <a:latin typeface="Calibri"/>
+              </a:rPr>
+              <a:t>›  Mismo loop para todos: AdamW, one-cycle, early stopping por CER de validación, semilla 42.</a:t>
+            </a:r>
+          </a:p>
+          <a:p>
+            <a:pPr>
+              <a:lnSpc>
+                <a:spcPct val="108000"/>
+              </a:lnSpc>
+              <a:spcAft>
+                <a:spcPts val="1600"/>
+              </a:spcAft>
+            </a:pPr>
+            <a:r>
+              <a:rPr sz="1650">
+                <a:solidFill>
+                  <a:srgbClr val="1B222D"/>
+                </a:solidFill>
+                <a:latin typeface="Calibri"/>
+              </a:rPr>
+              <a:t>›  Métrica principal: CER = ediciones / caracteres reales (la métrica de Kaggle es 1 − CER).</a:t>
+            </a:r>
+          </a:p>
+        </p:txBody>
+      </p:sp>
+      <p:sp>
+        <p:nvSpPr>
+          <p:cNvPr id="8" name="Rectangle 7"/>
+          <p:cNvSpPr/>
+          <p:nvPr/>
+        </p:nvSpPr>
+        <p:spPr>
+          <a:xfrm>
+            <a:off x="6858000" y="1645920"/>
+            <a:ext cx="2286000" cy="1737360"/>
+          </a:xfrm>
+          <a:prstGeom prst="rect">
+            <a:avLst/>
+          </a:prstGeom>
+          <a:solidFill>
+            <a:srgbClr val="FFFFFF"/>
+          </a:solidFill>
+          <a:ln>
+            <a:solidFill>
+              <a:srgbClr val="FFFFFF"/>
+            </a:solidFill>
+          </a:ln>
+          <a:effectLst/>
+        </p:spPr>
+        <p:style>
+          <a:lnRef idx="1">
+            <a:schemeClr val="accent1"/>
+          </a:lnRef>
+          <a:fillRef idx="3">
+            <a:schemeClr val="accent1"/>
+          </a:fillRef>
+          <a:effectRef idx="2">
+            <a:schemeClr val="accent1"/>
+          </a:effectRef>
+          <a:fontRef idx="minor">
+            <a:schemeClr val="lt1"/>
+          </a:fontRef>
+        </p:style>
+        <p:txBody>
+          <a:bodyPr rtlCol="0" anchor="ctr"/>
+          <a:lstStyle/>
+          <a:p>
+            <a:pPr algn="ctr"/>
+          </a:p>
+        </p:txBody>
+      </p:sp>
+      <p:sp>
+        <p:nvSpPr>
+          <p:cNvPr id="9" name="TextBox 8"/>
+          <p:cNvSpPr txBox="1"/>
+          <p:nvPr/>
+        </p:nvSpPr>
+        <p:spPr>
+          <a:xfrm>
+            <a:off x="6995160" y="1755648"/>
+            <a:ext cx="2011680" cy="1051560"/>
           </a:xfrm>
           <a:prstGeom prst="rect">
             <a:avLst/>
@@ -5521,19 +5985,2438 @@
           </a:bodyPr>
           <a:lstStyle/>
           <a:p>
+            <a:pPr algn="ctr">
+              <a:lnSpc>
+                <a:spcPct val="100000"/>
+              </a:lnSpc>
+            </a:pPr>
+            <a:r>
+              <a:rPr sz="3000" b="1" i="0">
+                <a:solidFill>
+                  <a:srgbClr val="F28C28"/>
+                </a:solidFill>
+                <a:latin typeface="Calibri"/>
+              </a:rPr>
+              <a:t>227</a:t>
+            </a:r>
+          </a:p>
+        </p:txBody>
+      </p:sp>
+      <p:sp>
+        <p:nvSpPr>
+          <p:cNvPr id="10" name="TextBox 9"/>
+          <p:cNvSpPr txBox="1"/>
+          <p:nvPr/>
+        </p:nvSpPr>
+        <p:spPr>
+          <a:xfrm>
+            <a:off x="6949440" y="2880360"/>
+            <a:ext cx="2103120" cy="457200"/>
+          </a:xfrm>
+          <a:prstGeom prst="rect">
+            <a:avLst/>
+          </a:prstGeom>
+          <a:noFill/>
+        </p:spPr>
+        <p:txBody>
+          <a:bodyPr wrap="square" anchor="t" lIns="0" rIns="0" tIns="0" bIns="0">
+            <a:spAutoFit/>
+          </a:bodyPr>
+          <a:lstStyle/>
+          <a:p>
+            <a:pPr algn="ctr">
+              <a:lnSpc>
+                <a:spcPct val="100000"/>
+              </a:lnSpc>
+            </a:pPr>
+            <a:r>
+              <a:rPr sz="1150" b="0" i="0">
+                <a:solidFill>
+                  <a:srgbClr val="5B6B7C"/>
+                </a:solidFill>
+                <a:latin typeface="Calibri"/>
+              </a:rPr>
+              <a:t>valores por</a:t>
+            </a:r>
+          </a:p>
+          <a:p>
+            <a:pPr algn="ctr">
+              <a:lnSpc>
+                <a:spcPct val="100000"/>
+              </a:lnSpc>
+            </a:pPr>
+            <a:r>
+              <a:rPr sz="1150" b="0" i="0">
+                <a:solidFill>
+                  <a:srgbClr val="5B6B7C"/>
+                </a:solidFill>
+                <a:latin typeface="Calibri"/>
+              </a:rPr>
+              <a:t>cuadro</a:t>
+            </a:r>
+          </a:p>
+        </p:txBody>
+      </p:sp>
+      <p:sp>
+        <p:nvSpPr>
+          <p:cNvPr id="11" name="Rectangle 10"/>
+          <p:cNvSpPr/>
+          <p:nvPr/>
+        </p:nvSpPr>
+        <p:spPr>
+          <a:xfrm>
+            <a:off x="9326880" y="1645920"/>
+            <a:ext cx="2286000" cy="1737360"/>
+          </a:xfrm>
+          <a:prstGeom prst="rect">
+            <a:avLst/>
+          </a:prstGeom>
+          <a:solidFill>
+            <a:srgbClr val="FFFFFF"/>
+          </a:solidFill>
+          <a:ln>
+            <a:solidFill>
+              <a:srgbClr val="FFFFFF"/>
+            </a:solidFill>
+          </a:ln>
+          <a:effectLst/>
+        </p:spPr>
+        <p:style>
+          <a:lnRef idx="1">
+            <a:schemeClr val="accent1"/>
+          </a:lnRef>
+          <a:fillRef idx="3">
+            <a:schemeClr val="accent1"/>
+          </a:fillRef>
+          <a:effectRef idx="2">
+            <a:schemeClr val="accent1"/>
+          </a:effectRef>
+          <a:fontRef idx="minor">
+            <a:schemeClr val="lt1"/>
+          </a:fontRef>
+        </p:style>
+        <p:txBody>
+          <a:bodyPr rtlCol="0" anchor="ctr"/>
+          <a:lstStyle/>
+          <a:p>
+            <a:pPr algn="ctr"/>
+          </a:p>
+        </p:txBody>
+      </p:sp>
+      <p:sp>
+        <p:nvSpPr>
+          <p:cNvPr id="12" name="TextBox 11"/>
+          <p:cNvSpPr txBox="1"/>
+          <p:nvPr/>
+        </p:nvSpPr>
+        <p:spPr>
+          <a:xfrm>
+            <a:off x="9464040" y="1755648"/>
+            <a:ext cx="2011680" cy="1051560"/>
+          </a:xfrm>
+          <a:prstGeom prst="rect">
+            <a:avLst/>
+          </a:prstGeom>
+          <a:noFill/>
+        </p:spPr>
+        <p:txBody>
+          <a:bodyPr wrap="square" anchor="t" lIns="0" rIns="0" tIns="0" bIns="0">
+            <a:spAutoFit/>
+          </a:bodyPr>
+          <a:lstStyle/>
+          <a:p>
+            <a:pPr algn="ctr">
+              <a:lnSpc>
+                <a:spcPct val="100000"/>
+              </a:lnSpc>
+            </a:pPr>
+            <a:r>
+              <a:rPr sz="3000" b="1" i="0">
+                <a:solidFill>
+                  <a:srgbClr val="F28C28"/>
+                </a:solidFill>
+                <a:latin typeface="Calibri"/>
+              </a:rPr>
+              <a:t>64/14/14</a:t>
+            </a:r>
+          </a:p>
+        </p:txBody>
+      </p:sp>
+      <p:sp>
+        <p:nvSpPr>
+          <p:cNvPr id="13" name="TextBox 12"/>
+          <p:cNvSpPr txBox="1"/>
+          <p:nvPr/>
+        </p:nvSpPr>
+        <p:spPr>
+          <a:xfrm>
+            <a:off x="9418320" y="2880360"/>
+            <a:ext cx="2103120" cy="457200"/>
+          </a:xfrm>
+          <a:prstGeom prst="rect">
+            <a:avLst/>
+          </a:prstGeom>
+          <a:noFill/>
+        </p:spPr>
+        <p:txBody>
+          <a:bodyPr wrap="square" anchor="t" lIns="0" rIns="0" tIns="0" bIns="0">
+            <a:spAutoFit/>
+          </a:bodyPr>
+          <a:lstStyle/>
+          <a:p>
+            <a:pPr algn="ctr">
+              <a:lnSpc>
+                <a:spcPct val="100000"/>
+              </a:lnSpc>
+            </a:pPr>
+            <a:r>
+              <a:rPr sz="1150" b="0" i="0">
+                <a:solidFill>
+                  <a:srgbClr val="5B6B7C"/>
+                </a:solidFill>
+                <a:latin typeface="Calibri"/>
+              </a:rPr>
+              <a:t>participantes</a:t>
+            </a:r>
+          </a:p>
+          <a:p>
+            <a:pPr algn="ctr">
+              <a:lnSpc>
+                <a:spcPct val="100000"/>
+              </a:lnSpc>
+            </a:pPr>
+            <a:r>
+              <a:rPr sz="1150" b="0" i="0">
+                <a:solidFill>
+                  <a:srgbClr val="5B6B7C"/>
+                </a:solidFill>
+                <a:latin typeface="Calibri"/>
+              </a:rPr>
+              <a:t>train / val / test</a:t>
+            </a:r>
+          </a:p>
+        </p:txBody>
+      </p:sp>
+      <p:sp>
+        <p:nvSpPr>
+          <p:cNvPr id="14" name="Rectangle 13"/>
+          <p:cNvSpPr/>
+          <p:nvPr/>
+        </p:nvSpPr>
+        <p:spPr>
+          <a:xfrm>
+            <a:off x="6858000" y="3566160"/>
+            <a:ext cx="2286000" cy="1737360"/>
+          </a:xfrm>
+          <a:prstGeom prst="rect">
+            <a:avLst/>
+          </a:prstGeom>
+          <a:solidFill>
+            <a:srgbClr val="FFFFFF"/>
+          </a:solidFill>
+          <a:ln>
+            <a:solidFill>
+              <a:srgbClr val="FFFFFF"/>
+            </a:solidFill>
+          </a:ln>
+          <a:effectLst/>
+        </p:spPr>
+        <p:style>
+          <a:lnRef idx="1">
+            <a:schemeClr val="accent1"/>
+          </a:lnRef>
+          <a:fillRef idx="3">
+            <a:schemeClr val="accent1"/>
+          </a:fillRef>
+          <a:effectRef idx="2">
+            <a:schemeClr val="accent1"/>
+          </a:effectRef>
+          <a:fontRef idx="minor">
+            <a:schemeClr val="lt1"/>
+          </a:fontRef>
+        </p:style>
+        <p:txBody>
+          <a:bodyPr rtlCol="0" anchor="ctr"/>
+          <a:lstStyle/>
+          <a:p>
+            <a:pPr algn="ctr"/>
+          </a:p>
+        </p:txBody>
+      </p:sp>
+      <p:sp>
+        <p:nvSpPr>
+          <p:cNvPr id="15" name="TextBox 14"/>
+          <p:cNvSpPr txBox="1"/>
+          <p:nvPr/>
+        </p:nvSpPr>
+        <p:spPr>
+          <a:xfrm>
+            <a:off x="6995160" y="3675888"/>
+            <a:ext cx="2011680" cy="1051560"/>
+          </a:xfrm>
+          <a:prstGeom prst="rect">
+            <a:avLst/>
+          </a:prstGeom>
+          <a:noFill/>
+        </p:spPr>
+        <p:txBody>
+          <a:bodyPr wrap="square" anchor="t" lIns="0" rIns="0" tIns="0" bIns="0">
+            <a:spAutoFit/>
+          </a:bodyPr>
+          <a:lstStyle/>
+          <a:p>
+            <a:pPr algn="ctr">
+              <a:lnSpc>
+                <a:spcPct val="100000"/>
+              </a:lnSpc>
+            </a:pPr>
+            <a:r>
+              <a:rPr sz="3000" b="1" i="0">
+                <a:solidFill>
+                  <a:srgbClr val="F28C28"/>
+                </a:solidFill>
+                <a:latin typeface="Calibri"/>
+              </a:rPr>
+              <a:t>1,315</a:t>
+            </a:r>
+          </a:p>
+        </p:txBody>
+      </p:sp>
+      <p:sp>
+        <p:nvSpPr>
+          <p:cNvPr id="16" name="TextBox 15"/>
+          <p:cNvSpPr txBox="1"/>
+          <p:nvPr/>
+        </p:nvSpPr>
+        <p:spPr>
+          <a:xfrm>
+            <a:off x="6949440" y="4800600"/>
+            <a:ext cx="2103120" cy="457200"/>
+          </a:xfrm>
+          <a:prstGeom prst="rect">
+            <a:avLst/>
+          </a:prstGeom>
+          <a:noFill/>
+        </p:spPr>
+        <p:txBody>
+          <a:bodyPr wrap="square" anchor="t" lIns="0" rIns="0" tIns="0" bIns="0">
+            <a:spAutoFit/>
+          </a:bodyPr>
+          <a:lstStyle/>
+          <a:p>
+            <a:pPr algn="ctr">
+              <a:lnSpc>
+                <a:spcPct val="100000"/>
+              </a:lnSpc>
+            </a:pPr>
+            <a:r>
+              <a:rPr sz="1150" b="0" i="0">
+                <a:solidFill>
+                  <a:srgbClr val="5B6B7C"/>
+                </a:solidFill>
+                <a:latin typeface="Calibri"/>
+              </a:rPr>
+              <a:t>secuencias de</a:t>
+            </a:r>
+          </a:p>
+          <a:p>
+            <a:pPr algn="ctr">
+              <a:lnSpc>
+                <a:spcPct val="100000"/>
+              </a:lnSpc>
+            </a:pPr>
+            <a:r>
+              <a:rPr sz="1150" b="0" i="0">
+                <a:solidFill>
+                  <a:srgbClr val="5B6B7C"/>
+                </a:solidFill>
+                <a:latin typeface="Calibri"/>
+              </a:rPr>
+              <a:t>entrenamiento</a:t>
+            </a:r>
+          </a:p>
+        </p:txBody>
+      </p:sp>
+      <p:sp>
+        <p:nvSpPr>
+          <p:cNvPr id="17" name="Rectangle 16"/>
+          <p:cNvSpPr/>
+          <p:nvPr/>
+        </p:nvSpPr>
+        <p:spPr>
+          <a:xfrm>
+            <a:off x="9326880" y="3566160"/>
+            <a:ext cx="2286000" cy="1737360"/>
+          </a:xfrm>
+          <a:prstGeom prst="rect">
+            <a:avLst/>
+          </a:prstGeom>
+          <a:solidFill>
+            <a:srgbClr val="FFFFFF"/>
+          </a:solidFill>
+          <a:ln>
+            <a:solidFill>
+              <a:srgbClr val="FFFFFF"/>
+            </a:solidFill>
+          </a:ln>
+          <a:effectLst/>
+        </p:spPr>
+        <p:style>
+          <a:lnRef idx="1">
+            <a:schemeClr val="accent1"/>
+          </a:lnRef>
+          <a:fillRef idx="3">
+            <a:schemeClr val="accent1"/>
+          </a:fillRef>
+          <a:effectRef idx="2">
+            <a:schemeClr val="accent1"/>
+          </a:effectRef>
+          <a:fontRef idx="minor">
+            <a:schemeClr val="lt1"/>
+          </a:fontRef>
+        </p:style>
+        <p:txBody>
+          <a:bodyPr rtlCol="0" anchor="ctr"/>
+          <a:lstStyle/>
+          <a:p>
+            <a:pPr algn="ctr"/>
+          </a:p>
+        </p:txBody>
+      </p:sp>
+      <p:sp>
+        <p:nvSpPr>
+          <p:cNvPr id="18" name="TextBox 17"/>
+          <p:cNvSpPr txBox="1"/>
+          <p:nvPr/>
+        </p:nvSpPr>
+        <p:spPr>
+          <a:xfrm>
+            <a:off x="9464040" y="3675888"/>
+            <a:ext cx="2011680" cy="1051560"/>
+          </a:xfrm>
+          <a:prstGeom prst="rect">
+            <a:avLst/>
+          </a:prstGeom>
+          <a:noFill/>
+        </p:spPr>
+        <p:txBody>
+          <a:bodyPr wrap="square" anchor="t" lIns="0" rIns="0" tIns="0" bIns="0">
+            <a:spAutoFit/>
+          </a:bodyPr>
+          <a:lstStyle/>
+          <a:p>
+            <a:pPr algn="ctr">
+              <a:lnSpc>
+                <a:spcPct val="100000"/>
+              </a:lnSpc>
+            </a:pPr>
+            <a:r>
+              <a:rPr sz="3000" b="1" i="0">
+                <a:solidFill>
+                  <a:srgbClr val="F28C28"/>
+                </a:solidFill>
+                <a:latin typeface="Calibri"/>
+              </a:rPr>
+              <a:t>295 / 268</a:t>
+            </a:r>
+          </a:p>
+        </p:txBody>
+      </p:sp>
+      <p:sp>
+        <p:nvSpPr>
+          <p:cNvPr id="19" name="TextBox 18"/>
+          <p:cNvSpPr txBox="1"/>
+          <p:nvPr/>
+        </p:nvSpPr>
+        <p:spPr>
+          <a:xfrm>
+            <a:off x="9418320" y="4800600"/>
+            <a:ext cx="2103120" cy="457200"/>
+          </a:xfrm>
+          <a:prstGeom prst="rect">
+            <a:avLst/>
+          </a:prstGeom>
+          <a:noFill/>
+        </p:spPr>
+        <p:txBody>
+          <a:bodyPr wrap="square" anchor="t" lIns="0" rIns="0" tIns="0" bIns="0">
+            <a:spAutoFit/>
+          </a:bodyPr>
+          <a:lstStyle/>
+          <a:p>
+            <a:pPr algn="ctr">
+              <a:lnSpc>
+                <a:spcPct val="100000"/>
+              </a:lnSpc>
+            </a:pPr>
+            <a:r>
+              <a:rPr sz="1150" b="0" i="0">
+                <a:solidFill>
+                  <a:srgbClr val="5B6B7C"/>
+                </a:solidFill>
+                <a:latin typeface="Calibri"/>
+              </a:rPr>
+              <a:t>secuencias de</a:t>
+            </a:r>
+          </a:p>
+          <a:p>
+            <a:pPr algn="ctr">
+              <a:lnSpc>
+                <a:spcPct val="100000"/>
+              </a:lnSpc>
+            </a:pPr>
+            <a:r>
+              <a:rPr sz="1150" b="0" i="0">
+                <a:solidFill>
+                  <a:srgbClr val="5B6B7C"/>
+                </a:solidFill>
+                <a:latin typeface="Calibri"/>
+              </a:rPr>
+              <a:t>validación / prueba</a:t>
+            </a:r>
+          </a:p>
+        </p:txBody>
+      </p:sp>
+      <p:sp>
+        <p:nvSpPr>
+          <p:cNvPr id="20" name="TextBox 19"/>
+          <p:cNvSpPr txBox="1"/>
+          <p:nvPr/>
+        </p:nvSpPr>
+        <p:spPr>
+          <a:xfrm>
+            <a:off x="11551615" y="6446520"/>
+            <a:ext cx="457200" cy="320040"/>
+          </a:xfrm>
+          <a:prstGeom prst="rect">
+            <a:avLst/>
+          </a:prstGeom>
+          <a:noFill/>
+        </p:spPr>
+        <p:txBody>
+          <a:bodyPr wrap="square" anchor="t" lIns="0" rIns="0" tIns="0" bIns="0">
+            <a:spAutoFit/>
+          </a:bodyPr>
+          <a:lstStyle/>
+          <a:p>
+            <a:pPr algn="r">
+              <a:lnSpc>
+                <a:spcPct val="100000"/>
+              </a:lnSpc>
+            </a:pPr>
+            <a:r>
+              <a:rPr sz="1100" b="0" i="0">
+                <a:solidFill>
+                  <a:srgbClr val="5B6B7C"/>
+                </a:solidFill>
+                <a:latin typeface="Calibri"/>
+              </a:rPr>
+              <a:t>16</a:t>
+            </a:r>
+          </a:p>
+        </p:txBody>
+      </p:sp>
+    </p:spTree>
+  </p:cSld>
+  <p:clrMapOvr>
+    <a:masterClrMapping/>
+  </p:clrMapOvr>
+</p:sld>
+</file>
+
+<file path=ppt/slides/slide17.xml><?xml version="1.0" encoding="utf-8"?>
+<p:sld xmlns:a="http://schemas.openxmlformats.org/drawingml/2006/main" xmlns:p="http://schemas.openxmlformats.org/presentationml/2006/main" xmlns:r="http://schemas.openxmlformats.org/officeDocument/2006/relationships">
+  <p:cSld>
+    <p:spTree>
+      <p:nvGrpSpPr>
+        <p:cNvPr id="1" name=""/>
+        <p:cNvGrpSpPr/>
+        <p:nvPr/>
+      </p:nvGrpSpPr>
+      <p:grpSpPr/>
+      <p:sp>
+        <p:nvSpPr>
+          <p:cNvPr id="2" name="Rectangle 1"/>
+          <p:cNvSpPr/>
+          <p:nvPr/>
+        </p:nvSpPr>
+        <p:spPr>
+          <a:xfrm>
+            <a:off x="0" y="0"/>
+            <a:ext cx="12191695" cy="6858000"/>
+          </a:xfrm>
+          <a:prstGeom prst="rect">
+            <a:avLst/>
+          </a:prstGeom>
+          <a:solidFill>
+            <a:srgbClr val="F6F8FA"/>
+          </a:solidFill>
+          <a:ln>
+            <a:noFill/>
+          </a:ln>
+          <a:effectLst/>
+        </p:spPr>
+        <p:style>
+          <a:lnRef idx="1">
+            <a:schemeClr val="accent1"/>
+          </a:lnRef>
+          <a:fillRef idx="3">
+            <a:schemeClr val="accent1"/>
+          </a:fillRef>
+          <a:effectRef idx="2">
+            <a:schemeClr val="accent1"/>
+          </a:effectRef>
+          <a:fontRef idx="minor">
+            <a:schemeClr val="lt1"/>
+          </a:fontRef>
+        </p:style>
+        <p:txBody>
+          <a:bodyPr rtlCol="0" anchor="ctr"/>
+          <a:lstStyle/>
+          <a:p>
+            <a:pPr algn="ctr"/>
+          </a:p>
+        </p:txBody>
+      </p:sp>
+      <p:sp>
+        <p:nvSpPr>
+          <p:cNvPr id="3" name="Rectangle 2"/>
+          <p:cNvSpPr/>
+          <p:nvPr/>
+        </p:nvSpPr>
+        <p:spPr>
+          <a:xfrm>
+            <a:off x="0" y="0"/>
+            <a:ext cx="12191695" cy="1234440"/>
+          </a:xfrm>
+          <a:prstGeom prst="rect">
+            <a:avLst/>
+          </a:prstGeom>
+          <a:solidFill>
+            <a:srgbClr val="0F1E33"/>
+          </a:solidFill>
+          <a:ln>
+            <a:noFill/>
+          </a:ln>
+          <a:effectLst/>
+        </p:spPr>
+        <p:style>
+          <a:lnRef idx="1">
+            <a:schemeClr val="accent1"/>
+          </a:lnRef>
+          <a:fillRef idx="3">
+            <a:schemeClr val="accent1"/>
+          </a:fillRef>
+          <a:effectRef idx="2">
+            <a:schemeClr val="accent1"/>
+          </a:effectRef>
+          <a:fontRef idx="minor">
+            <a:schemeClr val="lt1"/>
+          </a:fontRef>
+        </p:style>
+        <p:txBody>
+          <a:bodyPr rtlCol="0" anchor="ctr"/>
+          <a:lstStyle/>
+          <a:p>
+            <a:pPr algn="ctr"/>
+          </a:p>
+        </p:txBody>
+      </p:sp>
+      <p:sp>
+        <p:nvSpPr>
+          <p:cNvPr id="4" name="Rectangle 3"/>
+          <p:cNvSpPr/>
+          <p:nvPr/>
+        </p:nvSpPr>
+        <p:spPr>
+          <a:xfrm>
+            <a:off x="548640" y="384048"/>
+            <a:ext cx="320040" cy="54864"/>
+          </a:xfrm>
+          <a:prstGeom prst="rect">
+            <a:avLst/>
+          </a:prstGeom>
+          <a:solidFill>
+            <a:srgbClr val="2CA6A4"/>
+          </a:solidFill>
+          <a:ln>
+            <a:noFill/>
+          </a:ln>
+          <a:effectLst/>
+        </p:spPr>
+        <p:style>
+          <a:lnRef idx="1">
+            <a:schemeClr val="accent1"/>
+          </a:lnRef>
+          <a:fillRef idx="3">
+            <a:schemeClr val="accent1"/>
+          </a:fillRef>
+          <a:effectRef idx="2">
+            <a:schemeClr val="accent1"/>
+          </a:effectRef>
+          <a:fontRef idx="minor">
+            <a:schemeClr val="lt1"/>
+          </a:fontRef>
+        </p:style>
+        <p:txBody>
+          <a:bodyPr rtlCol="0" anchor="ctr"/>
+          <a:lstStyle/>
+          <a:p>
+            <a:pPr algn="ctr"/>
+          </a:p>
+        </p:txBody>
+      </p:sp>
+      <p:sp>
+        <p:nvSpPr>
+          <p:cNvPr id="5" name="TextBox 4"/>
+          <p:cNvSpPr txBox="1"/>
+          <p:nvPr/>
+        </p:nvSpPr>
+        <p:spPr>
+          <a:xfrm>
+            <a:off x="960120" y="274320"/>
+            <a:ext cx="8229600" cy="274320"/>
+          </a:xfrm>
+          <a:prstGeom prst="rect">
+            <a:avLst/>
+          </a:prstGeom>
+          <a:noFill/>
+        </p:spPr>
+        <p:txBody>
+          <a:bodyPr wrap="square" anchor="t" lIns="0" rIns="0" tIns="0" bIns="0">
+            <a:spAutoFit/>
+          </a:bodyPr>
+          <a:lstStyle/>
+          <a:p>
             <a:pPr algn="l">
               <a:lnSpc>
                 <a:spcPct val="100000"/>
               </a:lnSpc>
             </a:pPr>
             <a:r>
-              <a:rPr sz="1300" b="0" i="0">
+              <a:rPr sz="1200" b="1" i="0">
                 <a:solidFill>
                   <a:srgbClr val="2CA6A4"/>
                 </a:solidFill>
                 <a:latin typeface="Calibri"/>
               </a:rPr>
-              <a:t>Repositorio: https://github.com/DufreyM/CC3084-Proyecto2</a:t>
+              <a:t>MODELADO</a:t>
+            </a:r>
+          </a:p>
+        </p:txBody>
+      </p:sp>
+      <p:sp>
+        <p:nvSpPr>
+          <p:cNvPr id="6" name="TextBox 5"/>
+          <p:cNvSpPr txBox="1"/>
+          <p:nvPr/>
+        </p:nvSpPr>
+        <p:spPr>
+          <a:xfrm>
+            <a:off x="548640" y="548640"/>
+            <a:ext cx="10515600" cy="640080"/>
+          </a:xfrm>
+          <a:prstGeom prst="rect">
+            <a:avLst/>
+          </a:prstGeom>
+          <a:noFill/>
+        </p:spPr>
+        <p:txBody>
+          <a:bodyPr wrap="square" anchor="t" lIns="0" rIns="0" tIns="0" bIns="0">
+            <a:spAutoFit/>
+          </a:bodyPr>
+          <a:lstStyle/>
+          <a:p>
+            <a:pPr algn="l">
+              <a:lnSpc>
+                <a:spcPct val="100000"/>
+              </a:lnSpc>
+            </a:pPr>
+            <a:r>
+              <a:rPr sz="2500" b="1" i="0">
+                <a:solidFill>
+                  <a:srgbClr val="FFFFFF"/>
+                </a:solidFill>
+                <a:latin typeface="Calibri"/>
+              </a:rPr>
+              <a:t>Los modelos comparados</a:t>
+            </a:r>
+          </a:p>
+        </p:txBody>
+      </p:sp>
+      <p:sp>
+        <p:nvSpPr>
+          <p:cNvPr id="7" name="Rectangle 6"/>
+          <p:cNvSpPr/>
+          <p:nvPr/>
+        </p:nvSpPr>
+        <p:spPr>
+          <a:xfrm>
+            <a:off x="640080" y="1673352"/>
+            <a:ext cx="256032" cy="457200"/>
+          </a:xfrm>
+          <a:prstGeom prst="rect">
+            <a:avLst/>
+          </a:prstGeom>
+          <a:solidFill>
+            <a:srgbClr val="2CA6A4"/>
+          </a:solidFill>
+          <a:ln>
+            <a:noFill/>
+          </a:ln>
+          <a:effectLst/>
+        </p:spPr>
+        <p:style>
+          <a:lnRef idx="1">
+            <a:schemeClr val="accent1"/>
+          </a:lnRef>
+          <a:fillRef idx="3">
+            <a:schemeClr val="accent1"/>
+          </a:fillRef>
+          <a:effectRef idx="2">
+            <a:schemeClr val="accent1"/>
+          </a:effectRef>
+          <a:fontRef idx="minor">
+            <a:schemeClr val="lt1"/>
+          </a:fontRef>
+        </p:style>
+        <p:txBody>
+          <a:bodyPr rtlCol="0" anchor="ctr"/>
+          <a:lstStyle/>
+          <a:p>
+            <a:pPr algn="ctr"/>
+          </a:p>
+        </p:txBody>
+      </p:sp>
+      <p:sp>
+        <p:nvSpPr>
+          <p:cNvPr id="8" name="TextBox 7"/>
+          <p:cNvSpPr txBox="1"/>
+          <p:nvPr/>
+        </p:nvSpPr>
+        <p:spPr>
+          <a:xfrm>
+            <a:off x="1097280" y="1600200"/>
+            <a:ext cx="2377440" cy="548640"/>
+          </a:xfrm>
+          <a:prstGeom prst="rect">
+            <a:avLst/>
+          </a:prstGeom>
+          <a:noFill/>
+        </p:spPr>
+        <p:txBody>
+          <a:bodyPr wrap="square" anchor="t" lIns="0" rIns="0" tIns="0" bIns="0">
+            <a:spAutoFit/>
+          </a:bodyPr>
+          <a:lstStyle/>
+          <a:p>
+            <a:pPr algn="l">
+              <a:lnSpc>
+                <a:spcPct val="100000"/>
+              </a:lnSpc>
+            </a:pPr>
+            <a:r>
+              <a:rPr sz="2000" b="1" i="0">
+                <a:solidFill>
+                  <a:srgbClr val="1B222D"/>
+                </a:solidFill>
+                <a:latin typeface="Calibri"/>
+              </a:rPr>
+              <a:t>CNN-BiGRU</a:t>
+            </a:r>
+          </a:p>
+        </p:txBody>
+      </p:sp>
+      <p:sp>
+        <p:nvSpPr>
+          <p:cNvPr id="9" name="TextBox 8"/>
+          <p:cNvSpPr txBox="1"/>
+          <p:nvPr/>
+        </p:nvSpPr>
+        <p:spPr>
+          <a:xfrm>
+            <a:off x="3566160" y="1645920"/>
+            <a:ext cx="5120640" cy="548640"/>
+          </a:xfrm>
+          <a:prstGeom prst="rect">
+            <a:avLst/>
+          </a:prstGeom>
+          <a:noFill/>
+        </p:spPr>
+        <p:txBody>
+          <a:bodyPr wrap="square" anchor="t" lIns="0" rIns="0" tIns="0" bIns="0">
+            <a:spAutoFit/>
+          </a:bodyPr>
+          <a:lstStyle/>
+          <a:p>
+            <a:pPr algn="l">
+              <a:lnSpc>
+                <a:spcPct val="100000"/>
+              </a:lnSpc>
+            </a:pPr>
+            <a:r>
+              <a:rPr sz="1500" b="0" i="0">
+                <a:solidFill>
+                  <a:srgbClr val="5B6B7C"/>
+                </a:solidFill>
+                <a:latin typeface="Calibri"/>
+              </a:rPr>
+              <a:t>Principal · CNN 1D con stride + GRU bidireccional</a:t>
+            </a:r>
+          </a:p>
+        </p:txBody>
+      </p:sp>
+      <p:sp>
+        <p:nvSpPr>
+          <p:cNvPr id="10" name="TextBox 9"/>
+          <p:cNvSpPr txBox="1"/>
+          <p:nvPr/>
+        </p:nvSpPr>
+        <p:spPr>
+          <a:xfrm>
+            <a:off x="8778240" y="1618488"/>
+            <a:ext cx="2834640" cy="548640"/>
+          </a:xfrm>
+          <a:prstGeom prst="rect">
+            <a:avLst/>
+          </a:prstGeom>
+          <a:noFill/>
+        </p:spPr>
+        <p:txBody>
+          <a:bodyPr wrap="square" anchor="t" lIns="0" rIns="0" tIns="0" bIns="0">
+            <a:spAutoFit/>
+          </a:bodyPr>
+          <a:lstStyle/>
+          <a:p>
+            <a:pPr algn="r">
+              <a:lnSpc>
+                <a:spcPct val="100000"/>
+              </a:lnSpc>
+            </a:pPr>
+            <a:r>
+              <a:rPr sz="1700" b="1" i="0">
+                <a:solidFill>
+                  <a:srgbClr val="2CA6A4"/>
+                </a:solidFill>
+                <a:latin typeface="Calibri"/>
+              </a:rPr>
+              <a:t>CER prueba 0.490</a:t>
+            </a:r>
+          </a:p>
+        </p:txBody>
+      </p:sp>
+      <p:sp>
+        <p:nvSpPr>
+          <p:cNvPr id="11" name="Rectangle 10"/>
+          <p:cNvSpPr/>
+          <p:nvPr/>
+        </p:nvSpPr>
+        <p:spPr>
+          <a:xfrm>
+            <a:off x="640080" y="2587752"/>
+            <a:ext cx="256032" cy="457200"/>
+          </a:xfrm>
+          <a:prstGeom prst="rect">
+            <a:avLst/>
+          </a:prstGeom>
+          <a:solidFill>
+            <a:srgbClr val="F28C28"/>
+          </a:solidFill>
+          <a:ln>
+            <a:noFill/>
+          </a:ln>
+          <a:effectLst/>
+        </p:spPr>
+        <p:style>
+          <a:lnRef idx="1">
+            <a:schemeClr val="accent1"/>
+          </a:lnRef>
+          <a:fillRef idx="3">
+            <a:schemeClr val="accent1"/>
+          </a:fillRef>
+          <a:effectRef idx="2">
+            <a:schemeClr val="accent1"/>
+          </a:effectRef>
+          <a:fontRef idx="minor">
+            <a:schemeClr val="lt1"/>
+          </a:fontRef>
+        </p:style>
+        <p:txBody>
+          <a:bodyPr rtlCol="0" anchor="ctr"/>
+          <a:lstStyle/>
+          <a:p>
+            <a:pPr algn="ctr"/>
+          </a:p>
+        </p:txBody>
+      </p:sp>
+      <p:sp>
+        <p:nvSpPr>
+          <p:cNvPr id="12" name="TextBox 11"/>
+          <p:cNvSpPr txBox="1"/>
+          <p:nvPr/>
+        </p:nvSpPr>
+        <p:spPr>
+          <a:xfrm>
+            <a:off x="1097280" y="2514600"/>
+            <a:ext cx="2377440" cy="548640"/>
+          </a:xfrm>
+          <a:prstGeom prst="rect">
+            <a:avLst/>
+          </a:prstGeom>
+          <a:noFill/>
+        </p:spPr>
+        <p:txBody>
+          <a:bodyPr wrap="square" anchor="t" lIns="0" rIns="0" tIns="0" bIns="0">
+            <a:spAutoFit/>
+          </a:bodyPr>
+          <a:lstStyle/>
+          <a:p>
+            <a:pPr algn="l">
+              <a:lnSpc>
+                <a:spcPct val="100000"/>
+              </a:lnSpc>
+            </a:pPr>
+            <a:r>
+              <a:rPr sz="2000" b="1" i="0">
+                <a:solidFill>
+                  <a:srgbClr val="1B222D"/>
+                </a:solidFill>
+                <a:latin typeface="Calibri"/>
+              </a:rPr>
+              <a:t>Transformer</a:t>
+            </a:r>
+          </a:p>
+        </p:txBody>
+      </p:sp>
+      <p:sp>
+        <p:nvSpPr>
+          <p:cNvPr id="13" name="TextBox 12"/>
+          <p:cNvSpPr txBox="1"/>
+          <p:nvPr/>
+        </p:nvSpPr>
+        <p:spPr>
+          <a:xfrm>
+            <a:off x="3566160" y="2560320"/>
+            <a:ext cx="5120640" cy="548640"/>
+          </a:xfrm>
+          <a:prstGeom prst="rect">
+            <a:avLst/>
+          </a:prstGeom>
+          <a:noFill/>
+        </p:spPr>
+        <p:txBody>
+          <a:bodyPr wrap="square" anchor="t" lIns="0" rIns="0" tIns="0" bIns="0">
+            <a:spAutoFit/>
+          </a:bodyPr>
+          <a:lstStyle/>
+          <a:p>
+            <a:pPr algn="l">
+              <a:lnSpc>
+                <a:spcPct val="100000"/>
+              </a:lnSpc>
+            </a:pPr>
+            <a:r>
+              <a:rPr sz="1500" b="0" i="0">
+                <a:solidFill>
+                  <a:srgbClr val="5B6B7C"/>
+                </a:solidFill>
+                <a:latin typeface="Calibri"/>
+              </a:rPr>
+              <a:t>Mayor techo · Conv1d con stride + encoder Transformer</a:t>
+            </a:r>
+          </a:p>
+        </p:txBody>
+      </p:sp>
+      <p:sp>
+        <p:nvSpPr>
+          <p:cNvPr id="14" name="TextBox 13"/>
+          <p:cNvSpPr txBox="1"/>
+          <p:nvPr/>
+        </p:nvSpPr>
+        <p:spPr>
+          <a:xfrm>
+            <a:off x="8778240" y="2532888"/>
+            <a:ext cx="2834640" cy="548640"/>
+          </a:xfrm>
+          <a:prstGeom prst="rect">
+            <a:avLst/>
+          </a:prstGeom>
+          <a:noFill/>
+        </p:spPr>
+        <p:txBody>
+          <a:bodyPr wrap="square" anchor="t" lIns="0" rIns="0" tIns="0" bIns="0">
+            <a:spAutoFit/>
+          </a:bodyPr>
+          <a:lstStyle/>
+          <a:p>
+            <a:pPr algn="r">
+              <a:lnSpc>
+                <a:spcPct val="100000"/>
+              </a:lnSpc>
+            </a:pPr>
+            <a:r>
+              <a:rPr sz="1700" b="1" i="0">
+                <a:solidFill>
+                  <a:srgbClr val="F28C28"/>
+                </a:solidFill>
+                <a:latin typeface="Calibri"/>
+              </a:rPr>
+              <a:t>CER prueba 0.499</a:t>
+            </a:r>
+          </a:p>
+        </p:txBody>
+      </p:sp>
+      <p:sp>
+        <p:nvSpPr>
+          <p:cNvPr id="15" name="Rectangle 14"/>
+          <p:cNvSpPr/>
+          <p:nvPr/>
+        </p:nvSpPr>
+        <p:spPr>
+          <a:xfrm>
+            <a:off x="640080" y="3502152"/>
+            <a:ext cx="256032" cy="457200"/>
+          </a:xfrm>
+          <a:prstGeom prst="rect">
+            <a:avLst/>
+          </a:prstGeom>
+          <a:solidFill>
+            <a:srgbClr val="3B6EA8"/>
+          </a:solidFill>
+          <a:ln>
+            <a:noFill/>
+          </a:ln>
+          <a:effectLst/>
+        </p:spPr>
+        <p:style>
+          <a:lnRef idx="1">
+            <a:schemeClr val="accent1"/>
+          </a:lnRef>
+          <a:fillRef idx="3">
+            <a:schemeClr val="accent1"/>
+          </a:fillRef>
+          <a:effectRef idx="2">
+            <a:schemeClr val="accent1"/>
+          </a:effectRef>
+          <a:fontRef idx="minor">
+            <a:schemeClr val="lt1"/>
+          </a:fontRef>
+        </p:style>
+        <p:txBody>
+          <a:bodyPr rtlCol="0" anchor="ctr"/>
+          <a:lstStyle/>
+          <a:p>
+            <a:pPr algn="ctr"/>
+          </a:p>
+        </p:txBody>
+      </p:sp>
+      <p:sp>
+        <p:nvSpPr>
+          <p:cNvPr id="16" name="TextBox 15"/>
+          <p:cNvSpPr txBox="1"/>
+          <p:nvPr/>
+        </p:nvSpPr>
+        <p:spPr>
+          <a:xfrm>
+            <a:off x="1097280" y="3429000"/>
+            <a:ext cx="2377440" cy="548640"/>
+          </a:xfrm>
+          <a:prstGeom prst="rect">
+            <a:avLst/>
+          </a:prstGeom>
+          <a:noFill/>
+        </p:spPr>
+        <p:txBody>
+          <a:bodyPr wrap="square" anchor="t" lIns="0" rIns="0" tIns="0" bIns="0">
+            <a:spAutoFit/>
+          </a:bodyPr>
+          <a:lstStyle/>
+          <a:p>
+            <a:pPr algn="l">
+              <a:lnSpc>
+                <a:spcPct val="100000"/>
+              </a:lnSpc>
+            </a:pPr>
+            <a:r>
+              <a:rPr sz="2000" b="1" i="0">
+                <a:solidFill>
+                  <a:srgbClr val="1B222D"/>
+                </a:solidFill>
+                <a:latin typeface="Calibri"/>
+              </a:rPr>
+              <a:t>LSTM</a:t>
+            </a:r>
+          </a:p>
+        </p:txBody>
+      </p:sp>
+      <p:sp>
+        <p:nvSpPr>
+          <p:cNvPr id="17" name="TextBox 16"/>
+          <p:cNvSpPr txBox="1"/>
+          <p:nvPr/>
+        </p:nvSpPr>
+        <p:spPr>
+          <a:xfrm>
+            <a:off x="3566160" y="3474720"/>
+            <a:ext cx="5120640" cy="548640"/>
+          </a:xfrm>
+          <a:prstGeom prst="rect">
+            <a:avLst/>
+          </a:prstGeom>
+          <a:noFill/>
+        </p:spPr>
+        <p:txBody>
+          <a:bodyPr wrap="square" anchor="t" lIns="0" rIns="0" tIns="0" bIns="0">
+            <a:spAutoFit/>
+          </a:bodyPr>
+          <a:lstStyle/>
+          <a:p>
+            <a:pPr algn="l">
+              <a:lnSpc>
+                <a:spcPct val="100000"/>
+              </a:lnSpc>
+            </a:pPr>
+            <a:r>
+              <a:rPr sz="1500" b="0" i="0">
+                <a:solidFill>
+                  <a:srgbClr val="5B6B7C"/>
+                </a:solidFill>
+                <a:latin typeface="Calibri"/>
+              </a:rPr>
+              <a:t>Línea base · LSTM unidireccional</a:t>
+            </a:r>
+          </a:p>
+        </p:txBody>
+      </p:sp>
+      <p:sp>
+        <p:nvSpPr>
+          <p:cNvPr id="18" name="TextBox 17"/>
+          <p:cNvSpPr txBox="1"/>
+          <p:nvPr/>
+        </p:nvSpPr>
+        <p:spPr>
+          <a:xfrm>
+            <a:off x="8778240" y="3447288"/>
+            <a:ext cx="2834640" cy="548640"/>
+          </a:xfrm>
+          <a:prstGeom prst="rect">
+            <a:avLst/>
+          </a:prstGeom>
+          <a:noFill/>
+        </p:spPr>
+        <p:txBody>
+          <a:bodyPr wrap="square" anchor="t" lIns="0" rIns="0" tIns="0" bIns="0">
+            <a:spAutoFit/>
+          </a:bodyPr>
+          <a:lstStyle/>
+          <a:p>
+            <a:pPr algn="r">
+              <a:lnSpc>
+                <a:spcPct val="100000"/>
+              </a:lnSpc>
+            </a:pPr>
+            <a:r>
+              <a:rPr sz="1700" b="0" i="0">
+                <a:solidFill>
+                  <a:srgbClr val="5B6B7C"/>
+                </a:solidFill>
+                <a:latin typeface="Calibri"/>
+              </a:rPr>
+              <a:t>pendiente</a:t>
+            </a:r>
+          </a:p>
+        </p:txBody>
+      </p:sp>
+      <p:sp>
+        <p:nvSpPr>
+          <p:cNvPr id="19" name="Rectangle 18"/>
+          <p:cNvSpPr/>
+          <p:nvPr/>
+        </p:nvSpPr>
+        <p:spPr>
+          <a:xfrm>
+            <a:off x="640080" y="4416552"/>
+            <a:ext cx="256032" cy="457200"/>
+          </a:xfrm>
+          <a:prstGeom prst="rect">
+            <a:avLst/>
+          </a:prstGeom>
+          <a:solidFill>
+            <a:srgbClr val="C8507A"/>
+          </a:solidFill>
+          <a:ln>
+            <a:noFill/>
+          </a:ln>
+          <a:effectLst/>
+        </p:spPr>
+        <p:style>
+          <a:lnRef idx="1">
+            <a:schemeClr val="accent1"/>
+          </a:lnRef>
+          <a:fillRef idx="3">
+            <a:schemeClr val="accent1"/>
+          </a:fillRef>
+          <a:effectRef idx="2">
+            <a:schemeClr val="accent1"/>
+          </a:effectRef>
+          <a:fontRef idx="minor">
+            <a:schemeClr val="lt1"/>
+          </a:fontRef>
+        </p:style>
+        <p:txBody>
+          <a:bodyPr rtlCol="0" anchor="ctr"/>
+          <a:lstStyle/>
+          <a:p>
+            <a:pPr algn="ctr"/>
+          </a:p>
+        </p:txBody>
+      </p:sp>
+      <p:sp>
+        <p:nvSpPr>
+          <p:cNvPr id="20" name="TextBox 19"/>
+          <p:cNvSpPr txBox="1"/>
+          <p:nvPr/>
+        </p:nvSpPr>
+        <p:spPr>
+          <a:xfrm>
+            <a:off x="1097280" y="4343400"/>
+            <a:ext cx="2377440" cy="548640"/>
+          </a:xfrm>
+          <a:prstGeom prst="rect">
+            <a:avLst/>
+          </a:prstGeom>
+          <a:noFill/>
+        </p:spPr>
+        <p:txBody>
+          <a:bodyPr wrap="square" anchor="t" lIns="0" rIns="0" tIns="0" bIns="0">
+            <a:spAutoFit/>
+          </a:bodyPr>
+          <a:lstStyle/>
+          <a:p>
+            <a:pPr algn="l">
+              <a:lnSpc>
+                <a:spcPct val="100000"/>
+              </a:lnSpc>
+            </a:pPr>
+            <a:r>
+              <a:rPr sz="2000" b="1" i="0">
+                <a:solidFill>
+                  <a:srgbClr val="1B222D"/>
+                </a:solidFill>
+                <a:latin typeface="Calibri"/>
+              </a:rPr>
+              <a:t>BiLSTM</a:t>
+            </a:r>
+          </a:p>
+        </p:txBody>
+      </p:sp>
+      <p:sp>
+        <p:nvSpPr>
+          <p:cNvPr id="21" name="TextBox 20"/>
+          <p:cNvSpPr txBox="1"/>
+          <p:nvPr/>
+        </p:nvSpPr>
+        <p:spPr>
+          <a:xfrm>
+            <a:off x="3566160" y="4389120"/>
+            <a:ext cx="5120640" cy="548640"/>
+          </a:xfrm>
+          <a:prstGeom prst="rect">
+            <a:avLst/>
+          </a:prstGeom>
+          <a:noFill/>
+        </p:spPr>
+        <p:txBody>
+          <a:bodyPr wrap="square" anchor="t" lIns="0" rIns="0" tIns="0" bIns="0">
+            <a:spAutoFit/>
+          </a:bodyPr>
+          <a:lstStyle/>
+          <a:p>
+            <a:pPr algn="l">
+              <a:lnSpc>
+                <a:spcPct val="100000"/>
+              </a:lnSpc>
+            </a:pPr>
+            <a:r>
+              <a:rPr sz="1500" b="0" i="0">
+                <a:solidFill>
+                  <a:srgbClr val="5B6B7C"/>
+                </a:solidFill>
+                <a:latin typeface="Calibri"/>
+              </a:rPr>
+              <a:t>Variante · LSTM bidireccional</a:t>
+            </a:r>
+          </a:p>
+        </p:txBody>
+      </p:sp>
+      <p:sp>
+        <p:nvSpPr>
+          <p:cNvPr id="22" name="TextBox 21"/>
+          <p:cNvSpPr txBox="1"/>
+          <p:nvPr/>
+        </p:nvSpPr>
+        <p:spPr>
+          <a:xfrm>
+            <a:off x="8778240" y="4361688"/>
+            <a:ext cx="2834640" cy="548640"/>
+          </a:xfrm>
+          <a:prstGeom prst="rect">
+            <a:avLst/>
+          </a:prstGeom>
+          <a:noFill/>
+        </p:spPr>
+        <p:txBody>
+          <a:bodyPr wrap="square" anchor="t" lIns="0" rIns="0" tIns="0" bIns="0">
+            <a:spAutoFit/>
+          </a:bodyPr>
+          <a:lstStyle/>
+          <a:p>
+            <a:pPr algn="r">
+              <a:lnSpc>
+                <a:spcPct val="100000"/>
+              </a:lnSpc>
+            </a:pPr>
+            <a:r>
+              <a:rPr sz="1700" b="0" i="0">
+                <a:solidFill>
+                  <a:srgbClr val="5B6B7C"/>
+                </a:solidFill>
+                <a:latin typeface="Calibri"/>
+              </a:rPr>
+              <a:t>pendiente</a:t>
+            </a:r>
+          </a:p>
+        </p:txBody>
+      </p:sp>
+      <p:sp>
+        <p:nvSpPr>
+          <p:cNvPr id="23" name="Rectangle 22"/>
+          <p:cNvSpPr/>
+          <p:nvPr/>
+        </p:nvSpPr>
+        <p:spPr>
+          <a:xfrm>
+            <a:off x="640080" y="5330952"/>
+            <a:ext cx="256032" cy="457200"/>
+          </a:xfrm>
+          <a:prstGeom prst="rect">
+            <a:avLst/>
+          </a:prstGeom>
+          <a:solidFill>
+            <a:srgbClr val="8E6BBF"/>
+          </a:solidFill>
+          <a:ln>
+            <a:noFill/>
+          </a:ln>
+          <a:effectLst/>
+        </p:spPr>
+        <p:style>
+          <a:lnRef idx="1">
+            <a:schemeClr val="accent1"/>
+          </a:lnRef>
+          <a:fillRef idx="3">
+            <a:schemeClr val="accent1"/>
+          </a:fillRef>
+          <a:effectRef idx="2">
+            <a:schemeClr val="accent1"/>
+          </a:effectRef>
+          <a:fontRef idx="minor">
+            <a:schemeClr val="lt1"/>
+          </a:fontRef>
+        </p:style>
+        <p:txBody>
+          <a:bodyPr rtlCol="0" anchor="ctr"/>
+          <a:lstStyle/>
+          <a:p>
+            <a:pPr algn="ctr"/>
+          </a:p>
+        </p:txBody>
+      </p:sp>
+      <p:sp>
+        <p:nvSpPr>
+          <p:cNvPr id="24" name="TextBox 23"/>
+          <p:cNvSpPr txBox="1"/>
+          <p:nvPr/>
+        </p:nvSpPr>
+        <p:spPr>
+          <a:xfrm>
+            <a:off x="1097280" y="5257800"/>
+            <a:ext cx="2377440" cy="548640"/>
+          </a:xfrm>
+          <a:prstGeom prst="rect">
+            <a:avLst/>
+          </a:prstGeom>
+          <a:noFill/>
+        </p:spPr>
+        <p:txBody>
+          <a:bodyPr wrap="square" anchor="t" lIns="0" rIns="0" tIns="0" bIns="0">
+            <a:spAutoFit/>
+          </a:bodyPr>
+          <a:lstStyle/>
+          <a:p>
+            <a:pPr algn="l">
+              <a:lnSpc>
+                <a:spcPct val="100000"/>
+              </a:lnSpc>
+            </a:pPr>
+            <a:r>
+              <a:rPr sz="2000" b="1" i="0">
+                <a:solidFill>
+                  <a:srgbClr val="1B222D"/>
+                </a:solidFill>
+                <a:latin typeface="Calibri"/>
+              </a:rPr>
+              <a:t>GRU</a:t>
+            </a:r>
+          </a:p>
+        </p:txBody>
+      </p:sp>
+      <p:sp>
+        <p:nvSpPr>
+          <p:cNvPr id="25" name="TextBox 24"/>
+          <p:cNvSpPr txBox="1"/>
+          <p:nvPr/>
+        </p:nvSpPr>
+        <p:spPr>
+          <a:xfrm>
+            <a:off x="3566160" y="5303520"/>
+            <a:ext cx="5120640" cy="548640"/>
+          </a:xfrm>
+          <a:prstGeom prst="rect">
+            <a:avLst/>
+          </a:prstGeom>
+          <a:noFill/>
+        </p:spPr>
+        <p:txBody>
+          <a:bodyPr wrap="square" anchor="t" lIns="0" rIns="0" tIns="0" bIns="0">
+            <a:spAutoFit/>
+          </a:bodyPr>
+          <a:lstStyle/>
+          <a:p>
+            <a:pPr algn="l">
+              <a:lnSpc>
+                <a:spcPct val="100000"/>
+              </a:lnSpc>
+            </a:pPr>
+            <a:r>
+              <a:rPr sz="1500" b="0" i="0">
+                <a:solidFill>
+                  <a:srgbClr val="5B6B7C"/>
+                </a:solidFill>
+                <a:latin typeface="Calibri"/>
+              </a:rPr>
+              <a:t>Ablación · GRU unidireccional</a:t>
+            </a:r>
+          </a:p>
+        </p:txBody>
+      </p:sp>
+      <p:sp>
+        <p:nvSpPr>
+          <p:cNvPr id="26" name="TextBox 25"/>
+          <p:cNvSpPr txBox="1"/>
+          <p:nvPr/>
+        </p:nvSpPr>
+        <p:spPr>
+          <a:xfrm>
+            <a:off x="8778240" y="5276088"/>
+            <a:ext cx="2834640" cy="548640"/>
+          </a:xfrm>
+          <a:prstGeom prst="rect">
+            <a:avLst/>
+          </a:prstGeom>
+          <a:noFill/>
+        </p:spPr>
+        <p:txBody>
+          <a:bodyPr wrap="square" anchor="t" lIns="0" rIns="0" tIns="0" bIns="0">
+            <a:spAutoFit/>
+          </a:bodyPr>
+          <a:lstStyle/>
+          <a:p>
+            <a:pPr algn="r">
+              <a:lnSpc>
+                <a:spcPct val="100000"/>
+              </a:lnSpc>
+            </a:pPr>
+            <a:r>
+              <a:rPr sz="1700" b="0" i="0">
+                <a:solidFill>
+                  <a:srgbClr val="5B6B7C"/>
+                </a:solidFill>
+                <a:latin typeface="Calibri"/>
+              </a:rPr>
+              <a:t>pendiente</a:t>
+            </a:r>
+          </a:p>
+        </p:txBody>
+      </p:sp>
+      <p:sp>
+        <p:nvSpPr>
+          <p:cNvPr id="27" name="TextBox 26"/>
+          <p:cNvSpPr txBox="1"/>
+          <p:nvPr/>
+        </p:nvSpPr>
+        <p:spPr>
+          <a:xfrm>
+            <a:off x="11551615" y="6446520"/>
+            <a:ext cx="457200" cy="320040"/>
+          </a:xfrm>
+          <a:prstGeom prst="rect">
+            <a:avLst/>
+          </a:prstGeom>
+          <a:noFill/>
+        </p:spPr>
+        <p:txBody>
+          <a:bodyPr wrap="square" anchor="t" lIns="0" rIns="0" tIns="0" bIns="0">
+            <a:spAutoFit/>
+          </a:bodyPr>
+          <a:lstStyle/>
+          <a:p>
+            <a:pPr algn="r">
+              <a:lnSpc>
+                <a:spcPct val="100000"/>
+              </a:lnSpc>
+            </a:pPr>
+            <a:r>
+              <a:rPr sz="1100" b="0" i="0">
+                <a:solidFill>
+                  <a:srgbClr val="5B6B7C"/>
+                </a:solidFill>
+                <a:latin typeface="Calibri"/>
+              </a:rPr>
+              <a:t>17</a:t>
+            </a:r>
+          </a:p>
+        </p:txBody>
+      </p:sp>
+    </p:spTree>
+  </p:cSld>
+  <p:clrMapOvr>
+    <a:masterClrMapping/>
+  </p:clrMapOvr>
+</p:sld>
+</file>
+
+<file path=ppt/slides/slide18.xml><?xml version="1.0" encoding="utf-8"?>
+<p:sld xmlns:a="http://schemas.openxmlformats.org/drawingml/2006/main" xmlns:p="http://schemas.openxmlformats.org/presentationml/2006/main" xmlns:r="http://schemas.openxmlformats.org/officeDocument/2006/relationships">
+  <p:cSld>
+    <p:spTree>
+      <p:nvGrpSpPr>
+        <p:cNvPr id="1" name=""/>
+        <p:cNvGrpSpPr/>
+        <p:nvPr/>
+      </p:nvGrpSpPr>
+      <p:grpSpPr/>
+      <p:sp>
+        <p:nvSpPr>
+          <p:cNvPr id="2" name="Rectangle 1"/>
+          <p:cNvSpPr/>
+          <p:nvPr/>
+        </p:nvSpPr>
+        <p:spPr>
+          <a:xfrm>
+            <a:off x="0" y="0"/>
+            <a:ext cx="12191695" cy="6858000"/>
+          </a:xfrm>
+          <a:prstGeom prst="rect">
+            <a:avLst/>
+          </a:prstGeom>
+          <a:solidFill>
+            <a:srgbClr val="172A45"/>
+          </a:solidFill>
+          <a:ln>
+            <a:noFill/>
+          </a:ln>
+          <a:effectLst/>
+        </p:spPr>
+        <p:style>
+          <a:lnRef idx="1">
+            <a:schemeClr val="accent1"/>
+          </a:lnRef>
+          <a:fillRef idx="3">
+            <a:schemeClr val="accent1"/>
+          </a:fillRef>
+          <a:effectRef idx="2">
+            <a:schemeClr val="accent1"/>
+          </a:effectRef>
+          <a:fontRef idx="minor">
+            <a:schemeClr val="lt1"/>
+          </a:fontRef>
+        </p:style>
+        <p:txBody>
+          <a:bodyPr rtlCol="0" anchor="ctr"/>
+          <a:lstStyle/>
+          <a:p>
+            <a:pPr algn="ctr"/>
+          </a:p>
+        </p:txBody>
+      </p:sp>
+      <p:sp>
+        <p:nvSpPr>
+          <p:cNvPr id="3" name="Rectangle 2"/>
+          <p:cNvSpPr/>
+          <p:nvPr/>
+        </p:nvSpPr>
+        <p:spPr>
+          <a:xfrm>
+            <a:off x="0" y="0"/>
+            <a:ext cx="256032" cy="6858000"/>
+          </a:xfrm>
+          <a:prstGeom prst="rect">
+            <a:avLst/>
+          </a:prstGeom>
+          <a:solidFill>
+            <a:srgbClr val="F28C28"/>
+          </a:solidFill>
+          <a:ln>
+            <a:noFill/>
+          </a:ln>
+          <a:effectLst/>
+        </p:spPr>
+        <p:style>
+          <a:lnRef idx="1">
+            <a:schemeClr val="accent1"/>
+          </a:lnRef>
+          <a:fillRef idx="3">
+            <a:schemeClr val="accent1"/>
+          </a:fillRef>
+          <a:effectRef idx="2">
+            <a:schemeClr val="accent1"/>
+          </a:effectRef>
+          <a:fontRef idx="minor">
+            <a:schemeClr val="lt1"/>
+          </a:fontRef>
+        </p:style>
+        <p:txBody>
+          <a:bodyPr rtlCol="0" anchor="ctr"/>
+          <a:lstStyle/>
+          <a:p>
+            <a:pPr algn="ctr"/>
+          </a:p>
+        </p:txBody>
+      </p:sp>
+      <p:sp>
+        <p:nvSpPr>
+          <p:cNvPr id="4" name="TextBox 3"/>
+          <p:cNvSpPr txBox="1"/>
+          <p:nvPr/>
+        </p:nvSpPr>
+        <p:spPr>
+          <a:xfrm>
+            <a:off x="822960" y="2286000"/>
+            <a:ext cx="2743200" cy="1188720"/>
+          </a:xfrm>
+          <a:prstGeom prst="rect">
+            <a:avLst/>
+          </a:prstGeom>
+          <a:noFill/>
+        </p:spPr>
+        <p:txBody>
+          <a:bodyPr wrap="square" anchor="t" lIns="0" rIns="0" tIns="0" bIns="0">
+            <a:spAutoFit/>
+          </a:bodyPr>
+          <a:lstStyle/>
+          <a:p>
+            <a:pPr algn="l">
+              <a:lnSpc>
+                <a:spcPct val="100000"/>
+              </a:lnSpc>
+            </a:pPr>
+            <a:r>
+              <a:rPr sz="6400" b="1" i="0">
+                <a:solidFill>
+                  <a:srgbClr val="2CA6A4"/>
+                </a:solidFill>
+                <a:latin typeface="Calibri"/>
+              </a:rPr>
+              <a:t/>
+            </a:r>
+          </a:p>
+        </p:txBody>
+      </p:sp>
+      <p:sp>
+        <p:nvSpPr>
+          <p:cNvPr id="5" name="TextBox 4"/>
+          <p:cNvSpPr txBox="1"/>
+          <p:nvPr/>
+        </p:nvSpPr>
+        <p:spPr>
+          <a:xfrm>
+            <a:off x="822960" y="3383280"/>
+            <a:ext cx="10058400" cy="1097280"/>
+          </a:xfrm>
+          <a:prstGeom prst="rect">
+            <a:avLst/>
+          </a:prstGeom>
+          <a:noFill/>
+        </p:spPr>
+        <p:txBody>
+          <a:bodyPr wrap="square" anchor="t" lIns="0" rIns="0" tIns="0" bIns="0">
+            <a:spAutoFit/>
+          </a:bodyPr>
+          <a:lstStyle/>
+          <a:p>
+            <a:pPr algn="l">
+              <a:lnSpc>
+                <a:spcPct val="100000"/>
+              </a:lnSpc>
+            </a:pPr>
+            <a:r>
+              <a:rPr sz="3400" b="1" i="0">
+                <a:solidFill>
+                  <a:srgbClr val="FFFFFF"/>
+                </a:solidFill>
+                <a:latin typeface="Calibri"/>
+              </a:rPr>
+              <a:t>Resultados</a:t>
+            </a:r>
+          </a:p>
+        </p:txBody>
+      </p:sp>
+      <p:sp>
+        <p:nvSpPr>
+          <p:cNvPr id="6" name="TextBox 5"/>
+          <p:cNvSpPr txBox="1"/>
+          <p:nvPr/>
+        </p:nvSpPr>
+        <p:spPr>
+          <a:xfrm>
+            <a:off x="822960" y="4206240"/>
+            <a:ext cx="9601200" cy="731520"/>
+          </a:xfrm>
+          <a:prstGeom prst="rect">
+            <a:avLst/>
+          </a:prstGeom>
+          <a:noFill/>
+        </p:spPr>
+        <p:txBody>
+          <a:bodyPr wrap="square" anchor="t" lIns="0" rIns="0" tIns="0" bIns="0">
+            <a:spAutoFit/>
+          </a:bodyPr>
+          <a:lstStyle/>
+          <a:p>
+            <a:pPr algn="l">
+              <a:lnSpc>
+                <a:spcPct val="100000"/>
+              </a:lnSpc>
+            </a:pPr>
+            <a:r>
+              <a:rPr sz="1600" b="0" i="0">
+                <a:solidFill>
+                  <a:srgbClr val="B8C4D0"/>
+                </a:solidFill>
+                <a:latin typeface="Calibri"/>
+              </a:rPr>
+              <a:t>Desempeño en prueba: personas que ningún modelo vio al entrenar</a:t>
+            </a:r>
+          </a:p>
+        </p:txBody>
+      </p:sp>
+      <p:sp>
+        <p:nvSpPr>
+          <p:cNvPr id="7" name="TextBox 6"/>
+          <p:cNvSpPr txBox="1"/>
+          <p:nvPr/>
+        </p:nvSpPr>
+        <p:spPr>
+          <a:xfrm>
+            <a:off x="11551615" y="6446520"/>
+            <a:ext cx="457200" cy="320040"/>
+          </a:xfrm>
+          <a:prstGeom prst="rect">
+            <a:avLst/>
+          </a:prstGeom>
+          <a:noFill/>
+        </p:spPr>
+        <p:txBody>
+          <a:bodyPr wrap="square" anchor="t" lIns="0" rIns="0" tIns="0" bIns="0">
+            <a:spAutoFit/>
+          </a:bodyPr>
+          <a:lstStyle/>
+          <a:p>
+            <a:pPr algn="r">
+              <a:lnSpc>
+                <a:spcPct val="100000"/>
+              </a:lnSpc>
+            </a:pPr>
+            <a:r>
+              <a:rPr sz="1100" b="0" i="0">
+                <a:solidFill>
+                  <a:srgbClr val="5B6B7C"/>
+                </a:solidFill>
+                <a:latin typeface="Calibri"/>
+              </a:rPr>
+              <a:t>18</a:t>
+            </a:r>
+          </a:p>
+        </p:txBody>
+      </p:sp>
+    </p:spTree>
+  </p:cSld>
+  <p:clrMapOvr>
+    <a:masterClrMapping/>
+  </p:clrMapOvr>
+</p:sld>
+</file>
+
+<file path=ppt/slides/slide19.xml><?xml version="1.0" encoding="utf-8"?>
+<p:sld xmlns:a="http://schemas.openxmlformats.org/drawingml/2006/main" xmlns:p="http://schemas.openxmlformats.org/presentationml/2006/main" xmlns:r="http://schemas.openxmlformats.org/officeDocument/2006/relationships">
+  <p:cSld>
+    <p:spTree>
+      <p:nvGrpSpPr>
+        <p:cNvPr id="1" name=""/>
+        <p:cNvGrpSpPr/>
+        <p:nvPr/>
+      </p:nvGrpSpPr>
+      <p:grpSpPr/>
+      <p:sp>
+        <p:nvSpPr>
+          <p:cNvPr id="2" name="Rectangle 1"/>
+          <p:cNvSpPr/>
+          <p:nvPr/>
+        </p:nvSpPr>
+        <p:spPr>
+          <a:xfrm>
+            <a:off x="0" y="0"/>
+            <a:ext cx="12191695" cy="6858000"/>
+          </a:xfrm>
+          <a:prstGeom prst="rect">
+            <a:avLst/>
+          </a:prstGeom>
+          <a:solidFill>
+            <a:srgbClr val="F6F8FA"/>
+          </a:solidFill>
+          <a:ln>
+            <a:noFill/>
+          </a:ln>
+          <a:effectLst/>
+        </p:spPr>
+        <p:style>
+          <a:lnRef idx="1">
+            <a:schemeClr val="accent1"/>
+          </a:lnRef>
+          <a:fillRef idx="3">
+            <a:schemeClr val="accent1"/>
+          </a:fillRef>
+          <a:effectRef idx="2">
+            <a:schemeClr val="accent1"/>
+          </a:effectRef>
+          <a:fontRef idx="minor">
+            <a:schemeClr val="lt1"/>
+          </a:fontRef>
+        </p:style>
+        <p:txBody>
+          <a:bodyPr rtlCol="0" anchor="ctr"/>
+          <a:lstStyle/>
+          <a:p>
+            <a:pPr algn="ctr"/>
+          </a:p>
+        </p:txBody>
+      </p:sp>
+      <p:sp>
+        <p:nvSpPr>
+          <p:cNvPr id="3" name="Rectangle 2"/>
+          <p:cNvSpPr/>
+          <p:nvPr/>
+        </p:nvSpPr>
+        <p:spPr>
+          <a:xfrm>
+            <a:off x="0" y="0"/>
+            <a:ext cx="12191695" cy="1234440"/>
+          </a:xfrm>
+          <a:prstGeom prst="rect">
+            <a:avLst/>
+          </a:prstGeom>
+          <a:solidFill>
+            <a:srgbClr val="0F1E33"/>
+          </a:solidFill>
+          <a:ln>
+            <a:noFill/>
+          </a:ln>
+          <a:effectLst/>
+        </p:spPr>
+        <p:style>
+          <a:lnRef idx="1">
+            <a:schemeClr val="accent1"/>
+          </a:lnRef>
+          <a:fillRef idx="3">
+            <a:schemeClr val="accent1"/>
+          </a:fillRef>
+          <a:effectRef idx="2">
+            <a:schemeClr val="accent1"/>
+          </a:effectRef>
+          <a:fontRef idx="minor">
+            <a:schemeClr val="lt1"/>
+          </a:fontRef>
+        </p:style>
+        <p:txBody>
+          <a:bodyPr rtlCol="0" anchor="ctr"/>
+          <a:lstStyle/>
+          <a:p>
+            <a:pPr algn="ctr"/>
+          </a:p>
+        </p:txBody>
+      </p:sp>
+      <p:sp>
+        <p:nvSpPr>
+          <p:cNvPr id="4" name="Rectangle 3"/>
+          <p:cNvSpPr/>
+          <p:nvPr/>
+        </p:nvSpPr>
+        <p:spPr>
+          <a:xfrm>
+            <a:off x="548640" y="384048"/>
+            <a:ext cx="320040" cy="54864"/>
+          </a:xfrm>
+          <a:prstGeom prst="rect">
+            <a:avLst/>
+          </a:prstGeom>
+          <a:solidFill>
+            <a:srgbClr val="2CA6A4"/>
+          </a:solidFill>
+          <a:ln>
+            <a:noFill/>
+          </a:ln>
+          <a:effectLst/>
+        </p:spPr>
+        <p:style>
+          <a:lnRef idx="1">
+            <a:schemeClr val="accent1"/>
+          </a:lnRef>
+          <a:fillRef idx="3">
+            <a:schemeClr val="accent1"/>
+          </a:fillRef>
+          <a:effectRef idx="2">
+            <a:schemeClr val="accent1"/>
+          </a:effectRef>
+          <a:fontRef idx="minor">
+            <a:schemeClr val="lt1"/>
+          </a:fontRef>
+        </p:style>
+        <p:txBody>
+          <a:bodyPr rtlCol="0" anchor="ctr"/>
+          <a:lstStyle/>
+          <a:p>
+            <a:pPr algn="ctr"/>
+          </a:p>
+        </p:txBody>
+      </p:sp>
+      <p:sp>
+        <p:nvSpPr>
+          <p:cNvPr id="5" name="TextBox 4"/>
+          <p:cNvSpPr txBox="1"/>
+          <p:nvPr/>
+        </p:nvSpPr>
+        <p:spPr>
+          <a:xfrm>
+            <a:off x="960120" y="274320"/>
+            <a:ext cx="8229600" cy="274320"/>
+          </a:xfrm>
+          <a:prstGeom prst="rect">
+            <a:avLst/>
+          </a:prstGeom>
+          <a:noFill/>
+        </p:spPr>
+        <p:txBody>
+          <a:bodyPr wrap="square" anchor="t" lIns="0" rIns="0" tIns="0" bIns="0">
+            <a:spAutoFit/>
+          </a:bodyPr>
+          <a:lstStyle/>
+          <a:p>
+            <a:pPr algn="l">
+              <a:lnSpc>
+                <a:spcPct val="100000"/>
+              </a:lnSpc>
+            </a:pPr>
+            <a:r>
+              <a:rPr sz="1200" b="1" i="0">
+                <a:solidFill>
+                  <a:srgbClr val="2CA6A4"/>
+                </a:solidFill>
+                <a:latin typeface="Calibri"/>
+              </a:rPr>
+              <a:t>RESULTADOS</a:t>
+            </a:r>
+          </a:p>
+        </p:txBody>
+      </p:sp>
+      <p:sp>
+        <p:nvSpPr>
+          <p:cNvPr id="6" name="TextBox 5"/>
+          <p:cNvSpPr txBox="1"/>
+          <p:nvPr/>
+        </p:nvSpPr>
+        <p:spPr>
+          <a:xfrm>
+            <a:off x="548640" y="548640"/>
+            <a:ext cx="10515600" cy="640080"/>
+          </a:xfrm>
+          <a:prstGeom prst="rect">
+            <a:avLst/>
+          </a:prstGeom>
+          <a:noFill/>
+        </p:spPr>
+        <p:txBody>
+          <a:bodyPr wrap="square" anchor="t" lIns="0" rIns="0" tIns="0" bIns="0">
+            <a:spAutoFit/>
+          </a:bodyPr>
+          <a:lstStyle/>
+          <a:p>
+            <a:pPr algn="l">
+              <a:lnSpc>
+                <a:spcPct val="100000"/>
+              </a:lnSpc>
+            </a:pPr>
+            <a:r>
+              <a:rPr sz="2500" b="1" i="0">
+                <a:solidFill>
+                  <a:srgbClr val="FFFFFF"/>
+                </a:solidFill>
+                <a:latin typeface="Calibri"/>
+              </a:rPr>
+              <a:t>CER por modelo</a:t>
+            </a:r>
+          </a:p>
+        </p:txBody>
+      </p:sp>
+      <p:pic>
+        <p:nvPicPr>
+          <p:cNvPr id="7" name="Picture 6" descr="presentacion_cer_modelos.png"/>
+          <p:cNvPicPr>
+            <a:picLocks noChangeAspect="1"/>
+          </p:cNvPicPr>
+          <p:nvPr/>
+        </p:nvPicPr>
+        <p:blipFill>
+          <a:blip r:embed="rId2"/>
+          <a:stretch>
+            <a:fillRect/>
+          </a:stretch>
+        </p:blipFill>
+        <p:spPr>
+          <a:xfrm>
+            <a:off x="457200" y="1752369"/>
+            <a:ext cx="7589519" cy="4450542"/>
+          </a:xfrm>
+          <a:prstGeom prst="rect">
+            <a:avLst/>
+          </a:prstGeom>
+        </p:spPr>
+      </p:pic>
+      <p:sp>
+        <p:nvSpPr>
+          <p:cNvPr id="8" name="Rectangle 7"/>
+          <p:cNvSpPr/>
+          <p:nvPr/>
+        </p:nvSpPr>
+        <p:spPr>
+          <a:xfrm>
+            <a:off x="8412480" y="1737360"/>
+            <a:ext cx="3200400" cy="1737360"/>
+          </a:xfrm>
+          <a:prstGeom prst="rect">
+            <a:avLst/>
+          </a:prstGeom>
+          <a:solidFill>
+            <a:srgbClr val="FFFFFF"/>
+          </a:solidFill>
+          <a:ln>
+            <a:solidFill>
+              <a:srgbClr val="FFFFFF"/>
+            </a:solidFill>
+          </a:ln>
+          <a:effectLst/>
+        </p:spPr>
+        <p:style>
+          <a:lnRef idx="1">
+            <a:schemeClr val="accent1"/>
+          </a:lnRef>
+          <a:fillRef idx="3">
+            <a:schemeClr val="accent1"/>
+          </a:fillRef>
+          <a:effectRef idx="2">
+            <a:schemeClr val="accent1"/>
+          </a:effectRef>
+          <a:fontRef idx="minor">
+            <a:schemeClr val="lt1"/>
+          </a:fontRef>
+        </p:style>
+        <p:txBody>
+          <a:bodyPr rtlCol="0" anchor="ctr"/>
+          <a:lstStyle/>
+          <a:p>
+            <a:pPr algn="ctr"/>
+          </a:p>
+        </p:txBody>
+      </p:sp>
+      <p:sp>
+        <p:nvSpPr>
+          <p:cNvPr id="9" name="TextBox 8"/>
+          <p:cNvSpPr txBox="1"/>
+          <p:nvPr/>
+        </p:nvSpPr>
+        <p:spPr>
+          <a:xfrm>
+            <a:off x="8549640" y="1847088"/>
+            <a:ext cx="2926080" cy="1051560"/>
+          </a:xfrm>
+          <a:prstGeom prst="rect">
+            <a:avLst/>
+          </a:prstGeom>
+          <a:noFill/>
+        </p:spPr>
+        <p:txBody>
+          <a:bodyPr wrap="square" anchor="t" lIns="0" rIns="0" tIns="0" bIns="0">
+            <a:spAutoFit/>
+          </a:bodyPr>
+          <a:lstStyle/>
+          <a:p>
+            <a:pPr algn="ctr">
+              <a:lnSpc>
+                <a:spcPct val="100000"/>
+              </a:lnSpc>
+            </a:pPr>
+            <a:r>
+              <a:rPr sz="3000" b="1" i="0">
+                <a:solidFill>
+                  <a:srgbClr val="F28C28"/>
+                </a:solidFill>
+                <a:latin typeface="Calibri"/>
+              </a:rPr>
+              <a:t>0.490</a:t>
+            </a:r>
+          </a:p>
+        </p:txBody>
+      </p:sp>
+      <p:sp>
+        <p:nvSpPr>
+          <p:cNvPr id="10" name="TextBox 9"/>
+          <p:cNvSpPr txBox="1"/>
+          <p:nvPr/>
+        </p:nvSpPr>
+        <p:spPr>
+          <a:xfrm>
+            <a:off x="8503920" y="2971800"/>
+            <a:ext cx="3017520" cy="457200"/>
+          </a:xfrm>
+          <a:prstGeom prst="rect">
+            <a:avLst/>
+          </a:prstGeom>
+          <a:noFill/>
+        </p:spPr>
+        <p:txBody>
+          <a:bodyPr wrap="square" anchor="t" lIns="0" rIns="0" tIns="0" bIns="0">
+            <a:spAutoFit/>
+          </a:bodyPr>
+          <a:lstStyle/>
+          <a:p>
+            <a:pPr algn="ctr">
+              <a:lnSpc>
+                <a:spcPct val="100000"/>
+              </a:lnSpc>
+            </a:pPr>
+            <a:r>
+              <a:rPr sz="1150" b="0" i="0">
+                <a:solidFill>
+                  <a:srgbClr val="5B6B7C"/>
+                </a:solidFill>
+                <a:latin typeface="Calibri"/>
+              </a:rPr>
+              <a:t>CER en prueba del mejor</a:t>
+            </a:r>
+          </a:p>
+          <a:p>
+            <a:pPr algn="ctr">
+              <a:lnSpc>
+                <a:spcPct val="100000"/>
+              </a:lnSpc>
+            </a:pPr>
+            <a:r>
+              <a:rPr sz="1150" b="0" i="0">
+                <a:solidFill>
+                  <a:srgbClr val="5B6B7C"/>
+                </a:solidFill>
+                <a:latin typeface="Calibri"/>
+              </a:rPr>
+              <a:t>modelo (CNN-BiGRU)</a:t>
+            </a:r>
+          </a:p>
+        </p:txBody>
+      </p:sp>
+      <p:sp>
+        <p:nvSpPr>
+          <p:cNvPr id="11" name="Rectangle 10"/>
+          <p:cNvSpPr/>
+          <p:nvPr/>
+        </p:nvSpPr>
+        <p:spPr>
+          <a:xfrm>
+            <a:off x="8412480" y="3749039"/>
+            <a:ext cx="3200400" cy="1737360"/>
+          </a:xfrm>
+          <a:prstGeom prst="rect">
+            <a:avLst/>
+          </a:prstGeom>
+          <a:solidFill>
+            <a:srgbClr val="FFFFFF"/>
+          </a:solidFill>
+          <a:ln>
+            <a:solidFill>
+              <a:srgbClr val="FFFFFF"/>
+            </a:solidFill>
+          </a:ln>
+          <a:effectLst/>
+        </p:spPr>
+        <p:style>
+          <a:lnRef idx="1">
+            <a:schemeClr val="accent1"/>
+          </a:lnRef>
+          <a:fillRef idx="3">
+            <a:schemeClr val="accent1"/>
+          </a:fillRef>
+          <a:effectRef idx="2">
+            <a:schemeClr val="accent1"/>
+          </a:effectRef>
+          <a:fontRef idx="minor">
+            <a:schemeClr val="lt1"/>
+          </a:fontRef>
+        </p:style>
+        <p:txBody>
+          <a:bodyPr rtlCol="0" anchor="ctr"/>
+          <a:lstStyle/>
+          <a:p>
+            <a:pPr algn="ctr"/>
+          </a:p>
+        </p:txBody>
+      </p:sp>
+      <p:sp>
+        <p:nvSpPr>
+          <p:cNvPr id="12" name="TextBox 11"/>
+          <p:cNvSpPr txBox="1"/>
+          <p:nvPr/>
+        </p:nvSpPr>
+        <p:spPr>
+          <a:xfrm>
+            <a:off x="8549640" y="3858767"/>
+            <a:ext cx="2926080" cy="1051560"/>
+          </a:xfrm>
+          <a:prstGeom prst="rect">
+            <a:avLst/>
+          </a:prstGeom>
+          <a:noFill/>
+        </p:spPr>
+        <p:txBody>
+          <a:bodyPr wrap="square" anchor="t" lIns="0" rIns="0" tIns="0" bIns="0">
+            <a:spAutoFit/>
+          </a:bodyPr>
+          <a:lstStyle/>
+          <a:p>
+            <a:pPr algn="ctr">
+              <a:lnSpc>
+                <a:spcPct val="100000"/>
+              </a:lnSpc>
+            </a:pPr>
+            <a:r>
+              <a:rPr sz="3000" b="1" i="0">
+                <a:solidFill>
+                  <a:srgbClr val="F28C28"/>
+                </a:solidFill>
+                <a:latin typeface="Calibri"/>
+              </a:rPr>
+              <a:t>51 %</a:t>
+            </a:r>
+          </a:p>
+        </p:txBody>
+      </p:sp>
+      <p:sp>
+        <p:nvSpPr>
+          <p:cNvPr id="13" name="TextBox 12"/>
+          <p:cNvSpPr txBox="1"/>
+          <p:nvPr/>
+        </p:nvSpPr>
+        <p:spPr>
+          <a:xfrm>
+            <a:off x="8503920" y="4983479"/>
+            <a:ext cx="3017520" cy="457200"/>
+          </a:xfrm>
+          <a:prstGeom prst="rect">
+            <a:avLst/>
+          </a:prstGeom>
+          <a:noFill/>
+        </p:spPr>
+        <p:txBody>
+          <a:bodyPr wrap="square" anchor="t" lIns="0" rIns="0" tIns="0" bIns="0">
+            <a:spAutoFit/>
+          </a:bodyPr>
+          <a:lstStyle/>
+          <a:p>
+            <a:pPr algn="ctr">
+              <a:lnSpc>
+                <a:spcPct val="100000"/>
+              </a:lnSpc>
+            </a:pPr>
+            <a:r>
+              <a:rPr sz="1150" b="0" i="0">
+                <a:solidFill>
+                  <a:srgbClr val="5B6B7C"/>
+                </a:solidFill>
+                <a:latin typeface="Calibri"/>
+              </a:rPr>
+              <a:t>de caracteres correctos</a:t>
+            </a:r>
+          </a:p>
+          <a:p>
+            <a:pPr algn="ctr">
+              <a:lnSpc>
+                <a:spcPct val="100000"/>
+              </a:lnSpc>
+            </a:pPr>
+            <a:r>
+              <a:rPr sz="1150" b="0" i="0">
+                <a:solidFill>
+                  <a:srgbClr val="5B6B7C"/>
+                </a:solidFill>
+                <a:latin typeface="Calibri"/>
+              </a:rPr>
+              <a:t>(aprox. 1 − CER)</a:t>
+            </a:r>
+          </a:p>
+        </p:txBody>
+      </p:sp>
+      <p:sp>
+        <p:nvSpPr>
+          <p:cNvPr id="14" name="TextBox 13"/>
+          <p:cNvSpPr txBox="1"/>
+          <p:nvPr/>
+        </p:nvSpPr>
+        <p:spPr>
+          <a:xfrm>
+            <a:off x="11551615" y="6446520"/>
+            <a:ext cx="457200" cy="320040"/>
+          </a:xfrm>
+          <a:prstGeom prst="rect">
+            <a:avLst/>
+          </a:prstGeom>
+          <a:noFill/>
+        </p:spPr>
+        <p:txBody>
+          <a:bodyPr wrap="square" anchor="t" lIns="0" rIns="0" tIns="0" bIns="0">
+            <a:spAutoFit/>
+          </a:bodyPr>
+          <a:lstStyle/>
+          <a:p>
+            <a:pPr algn="r">
+              <a:lnSpc>
+                <a:spcPct val="100000"/>
+              </a:lnSpc>
+            </a:pPr>
+            <a:r>
+              <a:rPr sz="1100" b="0" i="0">
+                <a:solidFill>
+                  <a:srgbClr val="5B6B7C"/>
+                </a:solidFill>
+                <a:latin typeface="Calibri"/>
+              </a:rPr>
+              <a:t>19</a:t>
             </a:r>
           </a:p>
         </p:txBody>
@@ -6441,6 +9324,3220 @@
                 <a:latin typeface="Calibri"/>
               </a:rPr>
               <a:t>2</a:t>
+            </a:r>
+          </a:p>
+        </p:txBody>
+      </p:sp>
+    </p:spTree>
+  </p:cSld>
+  <p:clrMapOvr>
+    <a:masterClrMapping/>
+  </p:clrMapOvr>
+</p:sld>
+</file>
+
+<file path=ppt/slides/slide20.xml><?xml version="1.0" encoding="utf-8"?>
+<p:sld xmlns:a="http://schemas.openxmlformats.org/drawingml/2006/main" xmlns:p="http://schemas.openxmlformats.org/presentationml/2006/main" xmlns:r="http://schemas.openxmlformats.org/officeDocument/2006/relationships">
+  <p:cSld>
+    <p:spTree>
+      <p:nvGrpSpPr>
+        <p:cNvPr id="1" name=""/>
+        <p:cNvGrpSpPr/>
+        <p:nvPr/>
+      </p:nvGrpSpPr>
+      <p:grpSpPr/>
+      <p:sp>
+        <p:nvSpPr>
+          <p:cNvPr id="2" name="Rectangle 1"/>
+          <p:cNvSpPr/>
+          <p:nvPr/>
+        </p:nvSpPr>
+        <p:spPr>
+          <a:xfrm>
+            <a:off x="0" y="0"/>
+            <a:ext cx="12191695" cy="6858000"/>
+          </a:xfrm>
+          <a:prstGeom prst="rect">
+            <a:avLst/>
+          </a:prstGeom>
+          <a:solidFill>
+            <a:srgbClr val="F6F8FA"/>
+          </a:solidFill>
+          <a:ln>
+            <a:noFill/>
+          </a:ln>
+          <a:effectLst/>
+        </p:spPr>
+        <p:style>
+          <a:lnRef idx="1">
+            <a:schemeClr val="accent1"/>
+          </a:lnRef>
+          <a:fillRef idx="3">
+            <a:schemeClr val="accent1"/>
+          </a:fillRef>
+          <a:effectRef idx="2">
+            <a:schemeClr val="accent1"/>
+          </a:effectRef>
+          <a:fontRef idx="minor">
+            <a:schemeClr val="lt1"/>
+          </a:fontRef>
+        </p:style>
+        <p:txBody>
+          <a:bodyPr rtlCol="0" anchor="ctr"/>
+          <a:lstStyle/>
+          <a:p>
+            <a:pPr algn="ctr"/>
+          </a:p>
+        </p:txBody>
+      </p:sp>
+      <p:sp>
+        <p:nvSpPr>
+          <p:cNvPr id="3" name="Rectangle 2"/>
+          <p:cNvSpPr/>
+          <p:nvPr/>
+        </p:nvSpPr>
+        <p:spPr>
+          <a:xfrm>
+            <a:off x="0" y="0"/>
+            <a:ext cx="12191695" cy="1234440"/>
+          </a:xfrm>
+          <a:prstGeom prst="rect">
+            <a:avLst/>
+          </a:prstGeom>
+          <a:solidFill>
+            <a:srgbClr val="0F1E33"/>
+          </a:solidFill>
+          <a:ln>
+            <a:noFill/>
+          </a:ln>
+          <a:effectLst/>
+        </p:spPr>
+        <p:style>
+          <a:lnRef idx="1">
+            <a:schemeClr val="accent1"/>
+          </a:lnRef>
+          <a:fillRef idx="3">
+            <a:schemeClr val="accent1"/>
+          </a:fillRef>
+          <a:effectRef idx="2">
+            <a:schemeClr val="accent1"/>
+          </a:effectRef>
+          <a:fontRef idx="minor">
+            <a:schemeClr val="lt1"/>
+          </a:fontRef>
+        </p:style>
+        <p:txBody>
+          <a:bodyPr rtlCol="0" anchor="ctr"/>
+          <a:lstStyle/>
+          <a:p>
+            <a:pPr algn="ctr"/>
+          </a:p>
+        </p:txBody>
+      </p:sp>
+      <p:sp>
+        <p:nvSpPr>
+          <p:cNvPr id="4" name="Rectangle 3"/>
+          <p:cNvSpPr/>
+          <p:nvPr/>
+        </p:nvSpPr>
+        <p:spPr>
+          <a:xfrm>
+            <a:off x="548640" y="384048"/>
+            <a:ext cx="320040" cy="54864"/>
+          </a:xfrm>
+          <a:prstGeom prst="rect">
+            <a:avLst/>
+          </a:prstGeom>
+          <a:solidFill>
+            <a:srgbClr val="2CA6A4"/>
+          </a:solidFill>
+          <a:ln>
+            <a:noFill/>
+          </a:ln>
+          <a:effectLst/>
+        </p:spPr>
+        <p:style>
+          <a:lnRef idx="1">
+            <a:schemeClr val="accent1"/>
+          </a:lnRef>
+          <a:fillRef idx="3">
+            <a:schemeClr val="accent1"/>
+          </a:fillRef>
+          <a:effectRef idx="2">
+            <a:schemeClr val="accent1"/>
+          </a:effectRef>
+          <a:fontRef idx="minor">
+            <a:schemeClr val="lt1"/>
+          </a:fontRef>
+        </p:style>
+        <p:txBody>
+          <a:bodyPr rtlCol="0" anchor="ctr"/>
+          <a:lstStyle/>
+          <a:p>
+            <a:pPr algn="ctr"/>
+          </a:p>
+        </p:txBody>
+      </p:sp>
+      <p:sp>
+        <p:nvSpPr>
+          <p:cNvPr id="5" name="TextBox 4"/>
+          <p:cNvSpPr txBox="1"/>
+          <p:nvPr/>
+        </p:nvSpPr>
+        <p:spPr>
+          <a:xfrm>
+            <a:off x="960120" y="274320"/>
+            <a:ext cx="8229600" cy="274320"/>
+          </a:xfrm>
+          <a:prstGeom prst="rect">
+            <a:avLst/>
+          </a:prstGeom>
+          <a:noFill/>
+        </p:spPr>
+        <p:txBody>
+          <a:bodyPr wrap="square" anchor="t" lIns="0" rIns="0" tIns="0" bIns="0">
+            <a:spAutoFit/>
+          </a:bodyPr>
+          <a:lstStyle/>
+          <a:p>
+            <a:pPr algn="l">
+              <a:lnSpc>
+                <a:spcPct val="100000"/>
+              </a:lnSpc>
+            </a:pPr>
+            <a:r>
+              <a:rPr sz="1200" b="1" i="0">
+                <a:solidFill>
+                  <a:srgbClr val="2CA6A4"/>
+                </a:solidFill>
+                <a:latin typeface="Calibri"/>
+              </a:rPr>
+              <a:t>RESULTADOS</a:t>
+            </a:r>
+          </a:p>
+        </p:txBody>
+      </p:sp>
+      <p:sp>
+        <p:nvSpPr>
+          <p:cNvPr id="6" name="TextBox 5"/>
+          <p:cNvSpPr txBox="1"/>
+          <p:nvPr/>
+        </p:nvSpPr>
+        <p:spPr>
+          <a:xfrm>
+            <a:off x="548640" y="548640"/>
+            <a:ext cx="10515600" cy="640080"/>
+          </a:xfrm>
+          <a:prstGeom prst="rect">
+            <a:avLst/>
+          </a:prstGeom>
+          <a:noFill/>
+        </p:spPr>
+        <p:txBody>
+          <a:bodyPr wrap="square" anchor="t" lIns="0" rIns="0" tIns="0" bIns="0">
+            <a:spAutoFit/>
+          </a:bodyPr>
+          <a:lstStyle/>
+          <a:p>
+            <a:pPr algn="l">
+              <a:lnSpc>
+                <a:spcPct val="100000"/>
+              </a:lnSpc>
+            </a:pPr>
+            <a:r>
+              <a:rPr sz="2500" b="1" i="0">
+                <a:solidFill>
+                  <a:srgbClr val="FFFFFF"/>
+                </a:solidFill>
+                <a:latin typeface="Calibri"/>
+              </a:rPr>
+              <a:t>Costo vs. error</a:t>
+            </a:r>
+          </a:p>
+        </p:txBody>
+      </p:sp>
+      <p:pic>
+        <p:nvPicPr>
+          <p:cNvPr id="7" name="Picture 6" descr="presentacion_costo_error.png"/>
+          <p:cNvPicPr>
+            <a:picLocks noChangeAspect="1"/>
+          </p:cNvPicPr>
+          <p:nvPr/>
+        </p:nvPicPr>
+        <p:blipFill>
+          <a:blip r:embed="rId2"/>
+          <a:stretch>
+            <a:fillRect/>
+          </a:stretch>
+        </p:blipFill>
+        <p:spPr>
+          <a:xfrm>
+            <a:off x="457200" y="1659077"/>
+            <a:ext cx="7589519" cy="4637125"/>
+          </a:xfrm>
+          <a:prstGeom prst="rect">
+            <a:avLst/>
+          </a:prstGeom>
+        </p:spPr>
+      </p:pic>
+      <p:sp>
+        <p:nvSpPr>
+          <p:cNvPr id="8" name="TextBox 7"/>
+          <p:cNvSpPr txBox="1"/>
+          <p:nvPr/>
+        </p:nvSpPr>
+        <p:spPr>
+          <a:xfrm>
+            <a:off x="8229600" y="1828800"/>
+            <a:ext cx="3566160" cy="4389120"/>
+          </a:xfrm>
+          <a:prstGeom prst="rect">
+            <a:avLst/>
+          </a:prstGeom>
+          <a:noFill/>
+        </p:spPr>
+        <p:txBody>
+          <a:bodyPr wrap="square" lIns="0" rIns="0">
+            <a:spAutoFit/>
+          </a:bodyPr>
+          <a:lstStyle/>
+          <a:p>
+            <a:pPr>
+              <a:lnSpc>
+                <a:spcPct val="108000"/>
+              </a:lnSpc>
+              <a:spcAft>
+                <a:spcPts val="1200"/>
+              </a:spcAft>
+            </a:pPr>
+            <a:r>
+              <a:rPr sz="1450">
+                <a:solidFill>
+                  <a:srgbClr val="1B222D"/>
+                </a:solidFill>
+                <a:latin typeface="Calibri"/>
+              </a:rPr>
+              <a:t>›  CNN-BiGRU: 48 min de entrenamiento, 5.3 ms por secuencia.</a:t>
+            </a:r>
+          </a:p>
+          <a:p>
+            <a:pPr>
+              <a:lnSpc>
+                <a:spcPct val="108000"/>
+              </a:lnSpc>
+              <a:spcAft>
+                <a:spcPts val="1200"/>
+              </a:spcAft>
+            </a:pPr>
+            <a:r>
+              <a:rPr sz="1450">
+                <a:solidFill>
+                  <a:srgbClr val="1B222D"/>
+                </a:solidFill>
+                <a:latin typeface="Calibri"/>
+              </a:rPr>
+              <a:t>›  Transformer: 18 min de entrenamiento, 1.8 ms por secuencia.</a:t>
+            </a:r>
+          </a:p>
+          <a:p>
+            <a:pPr>
+              <a:lnSpc>
+                <a:spcPct val="108000"/>
+              </a:lnSpc>
+              <a:spcAft>
+                <a:spcPts val="1200"/>
+              </a:spcAft>
+            </a:pPr>
+            <a:r>
+              <a:rPr sz="1450">
+                <a:solidFill>
+                  <a:srgbClr val="1B222D"/>
+                </a:solidFill>
+                <a:latin typeface="Calibri"/>
+              </a:rPr>
+              <a:t>›  El tamaño de cada burbuja es el número de parámetros.</a:t>
+            </a:r>
+          </a:p>
+        </p:txBody>
+      </p:sp>
+      <p:sp>
+        <p:nvSpPr>
+          <p:cNvPr id="9" name="TextBox 8"/>
+          <p:cNvSpPr txBox="1"/>
+          <p:nvPr/>
+        </p:nvSpPr>
+        <p:spPr>
+          <a:xfrm>
+            <a:off x="11551615" y="6446520"/>
+            <a:ext cx="457200" cy="320040"/>
+          </a:xfrm>
+          <a:prstGeom prst="rect">
+            <a:avLst/>
+          </a:prstGeom>
+          <a:noFill/>
+        </p:spPr>
+        <p:txBody>
+          <a:bodyPr wrap="square" anchor="t" lIns="0" rIns="0" tIns="0" bIns="0">
+            <a:spAutoFit/>
+          </a:bodyPr>
+          <a:lstStyle/>
+          <a:p>
+            <a:pPr algn="r">
+              <a:lnSpc>
+                <a:spcPct val="100000"/>
+              </a:lnSpc>
+            </a:pPr>
+            <a:r>
+              <a:rPr sz="1100" b="0" i="0">
+                <a:solidFill>
+                  <a:srgbClr val="5B6B7C"/>
+                </a:solidFill>
+                <a:latin typeface="Calibri"/>
+              </a:rPr>
+              <a:t>20</a:t>
+            </a:r>
+          </a:p>
+        </p:txBody>
+      </p:sp>
+    </p:spTree>
+  </p:cSld>
+  <p:clrMapOvr>
+    <a:masterClrMapping/>
+  </p:clrMapOvr>
+</p:sld>
+</file>
+
+<file path=ppt/slides/slide21.xml><?xml version="1.0" encoding="utf-8"?>
+<p:sld xmlns:a="http://schemas.openxmlformats.org/drawingml/2006/main" xmlns:p="http://schemas.openxmlformats.org/presentationml/2006/main" xmlns:r="http://schemas.openxmlformats.org/officeDocument/2006/relationships">
+  <p:cSld>
+    <p:spTree>
+      <p:nvGrpSpPr>
+        <p:cNvPr id="1" name=""/>
+        <p:cNvGrpSpPr/>
+        <p:nvPr/>
+      </p:nvGrpSpPr>
+      <p:grpSpPr/>
+      <p:sp>
+        <p:nvSpPr>
+          <p:cNvPr id="2" name="Rectangle 1"/>
+          <p:cNvSpPr/>
+          <p:nvPr/>
+        </p:nvSpPr>
+        <p:spPr>
+          <a:xfrm>
+            <a:off x="0" y="0"/>
+            <a:ext cx="12191695" cy="6858000"/>
+          </a:xfrm>
+          <a:prstGeom prst="rect">
+            <a:avLst/>
+          </a:prstGeom>
+          <a:solidFill>
+            <a:srgbClr val="F6F8FA"/>
+          </a:solidFill>
+          <a:ln>
+            <a:noFill/>
+          </a:ln>
+          <a:effectLst/>
+        </p:spPr>
+        <p:style>
+          <a:lnRef idx="1">
+            <a:schemeClr val="accent1"/>
+          </a:lnRef>
+          <a:fillRef idx="3">
+            <a:schemeClr val="accent1"/>
+          </a:fillRef>
+          <a:effectRef idx="2">
+            <a:schemeClr val="accent1"/>
+          </a:effectRef>
+          <a:fontRef idx="minor">
+            <a:schemeClr val="lt1"/>
+          </a:fontRef>
+        </p:style>
+        <p:txBody>
+          <a:bodyPr rtlCol="0" anchor="ctr"/>
+          <a:lstStyle/>
+          <a:p>
+            <a:pPr algn="ctr"/>
+          </a:p>
+        </p:txBody>
+      </p:sp>
+      <p:sp>
+        <p:nvSpPr>
+          <p:cNvPr id="3" name="Rectangle 2"/>
+          <p:cNvSpPr/>
+          <p:nvPr/>
+        </p:nvSpPr>
+        <p:spPr>
+          <a:xfrm>
+            <a:off x="0" y="0"/>
+            <a:ext cx="12191695" cy="1234440"/>
+          </a:xfrm>
+          <a:prstGeom prst="rect">
+            <a:avLst/>
+          </a:prstGeom>
+          <a:solidFill>
+            <a:srgbClr val="0F1E33"/>
+          </a:solidFill>
+          <a:ln>
+            <a:noFill/>
+          </a:ln>
+          <a:effectLst/>
+        </p:spPr>
+        <p:style>
+          <a:lnRef idx="1">
+            <a:schemeClr val="accent1"/>
+          </a:lnRef>
+          <a:fillRef idx="3">
+            <a:schemeClr val="accent1"/>
+          </a:fillRef>
+          <a:effectRef idx="2">
+            <a:schemeClr val="accent1"/>
+          </a:effectRef>
+          <a:fontRef idx="minor">
+            <a:schemeClr val="lt1"/>
+          </a:fontRef>
+        </p:style>
+        <p:txBody>
+          <a:bodyPr rtlCol="0" anchor="ctr"/>
+          <a:lstStyle/>
+          <a:p>
+            <a:pPr algn="ctr"/>
+          </a:p>
+        </p:txBody>
+      </p:sp>
+      <p:sp>
+        <p:nvSpPr>
+          <p:cNvPr id="4" name="Rectangle 3"/>
+          <p:cNvSpPr/>
+          <p:nvPr/>
+        </p:nvSpPr>
+        <p:spPr>
+          <a:xfrm>
+            <a:off x="548640" y="384048"/>
+            <a:ext cx="320040" cy="54864"/>
+          </a:xfrm>
+          <a:prstGeom prst="rect">
+            <a:avLst/>
+          </a:prstGeom>
+          <a:solidFill>
+            <a:srgbClr val="2CA6A4"/>
+          </a:solidFill>
+          <a:ln>
+            <a:noFill/>
+          </a:ln>
+          <a:effectLst/>
+        </p:spPr>
+        <p:style>
+          <a:lnRef idx="1">
+            <a:schemeClr val="accent1"/>
+          </a:lnRef>
+          <a:fillRef idx="3">
+            <a:schemeClr val="accent1"/>
+          </a:fillRef>
+          <a:effectRef idx="2">
+            <a:schemeClr val="accent1"/>
+          </a:effectRef>
+          <a:fontRef idx="minor">
+            <a:schemeClr val="lt1"/>
+          </a:fontRef>
+        </p:style>
+        <p:txBody>
+          <a:bodyPr rtlCol="0" anchor="ctr"/>
+          <a:lstStyle/>
+          <a:p>
+            <a:pPr algn="ctr"/>
+          </a:p>
+        </p:txBody>
+      </p:sp>
+      <p:sp>
+        <p:nvSpPr>
+          <p:cNvPr id="5" name="TextBox 4"/>
+          <p:cNvSpPr txBox="1"/>
+          <p:nvPr/>
+        </p:nvSpPr>
+        <p:spPr>
+          <a:xfrm>
+            <a:off x="960120" y="274320"/>
+            <a:ext cx="8229600" cy="274320"/>
+          </a:xfrm>
+          <a:prstGeom prst="rect">
+            <a:avLst/>
+          </a:prstGeom>
+          <a:noFill/>
+        </p:spPr>
+        <p:txBody>
+          <a:bodyPr wrap="square" anchor="t" lIns="0" rIns="0" tIns="0" bIns="0">
+            <a:spAutoFit/>
+          </a:bodyPr>
+          <a:lstStyle/>
+          <a:p>
+            <a:pPr algn="l">
+              <a:lnSpc>
+                <a:spcPct val="100000"/>
+              </a:lnSpc>
+            </a:pPr>
+            <a:r>
+              <a:rPr sz="1200" b="1" i="0">
+                <a:solidFill>
+                  <a:srgbClr val="2CA6A4"/>
+                </a:solidFill>
+                <a:latin typeface="Calibri"/>
+              </a:rPr>
+              <a:t>RESULTADOS · PRINCIPAL</a:t>
+            </a:r>
+          </a:p>
+        </p:txBody>
+      </p:sp>
+      <p:sp>
+        <p:nvSpPr>
+          <p:cNvPr id="6" name="TextBox 5"/>
+          <p:cNvSpPr txBox="1"/>
+          <p:nvPr/>
+        </p:nvSpPr>
+        <p:spPr>
+          <a:xfrm>
+            <a:off x="548640" y="548640"/>
+            <a:ext cx="10515600" cy="640080"/>
+          </a:xfrm>
+          <a:prstGeom prst="rect">
+            <a:avLst/>
+          </a:prstGeom>
+          <a:noFill/>
+        </p:spPr>
+        <p:txBody>
+          <a:bodyPr wrap="square" anchor="t" lIns="0" rIns="0" tIns="0" bIns="0">
+            <a:spAutoFit/>
+          </a:bodyPr>
+          <a:lstStyle/>
+          <a:p>
+            <a:pPr algn="l">
+              <a:lnSpc>
+                <a:spcPct val="100000"/>
+              </a:lnSpc>
+            </a:pPr>
+            <a:r>
+              <a:rPr sz="2500" b="1" i="0">
+                <a:solidFill>
+                  <a:srgbClr val="FFFFFF"/>
+                </a:solidFill>
+                <a:latin typeface="Calibri"/>
+              </a:rPr>
+              <a:t>CNN-BiGRU: ajuste de hiperparámetros</a:t>
+            </a:r>
+          </a:p>
+        </p:txBody>
+      </p:sp>
+      <p:pic>
+        <p:nvPicPr>
+          <p:cNvPr id="7" name="Picture 6" descr="07_cnn_bigru_tuning.png"/>
+          <p:cNvPicPr>
+            <a:picLocks noChangeAspect="1"/>
+          </p:cNvPicPr>
+          <p:nvPr/>
+        </p:nvPicPr>
+        <p:blipFill>
+          <a:blip r:embed="rId2"/>
+          <a:stretch>
+            <a:fillRect/>
+          </a:stretch>
+        </p:blipFill>
+        <p:spPr>
+          <a:xfrm>
+            <a:off x="457200" y="2013929"/>
+            <a:ext cx="6949440" cy="3927422"/>
+          </a:xfrm>
+          <a:prstGeom prst="rect">
+            <a:avLst/>
+          </a:prstGeom>
+        </p:spPr>
+      </p:pic>
+      <p:sp>
+        <p:nvSpPr>
+          <p:cNvPr id="8" name="TextBox 7"/>
+          <p:cNvSpPr txBox="1"/>
+          <p:nvPr/>
+        </p:nvSpPr>
+        <p:spPr>
+          <a:xfrm>
+            <a:off x="7680960" y="1737360"/>
+            <a:ext cx="4023360" cy="4572000"/>
+          </a:xfrm>
+          <a:prstGeom prst="rect">
+            <a:avLst/>
+          </a:prstGeom>
+          <a:noFill/>
+        </p:spPr>
+        <p:txBody>
+          <a:bodyPr wrap="square" lIns="0" rIns="0">
+            <a:spAutoFit/>
+          </a:bodyPr>
+          <a:lstStyle/>
+          <a:p>
+            <a:pPr>
+              <a:lnSpc>
+                <a:spcPct val="108000"/>
+              </a:lnSpc>
+              <a:spcAft>
+                <a:spcPts val="1200"/>
+              </a:spcAft>
+            </a:pPr>
+            <a:r>
+              <a:rPr sz="1500">
+                <a:solidFill>
+                  <a:srgbClr val="1B222D"/>
+                </a:solidFill>
+                <a:latin typeface="Calibri"/>
+              </a:rPr>
+              <a:t>›  Más capacidad (256 canales, 192 unidades) dio el menor CER de validación.</a:t>
+            </a:r>
+          </a:p>
+          <a:p>
+            <a:pPr>
+              <a:lnSpc>
+                <a:spcPct val="108000"/>
+              </a:lnSpc>
+              <a:spcAft>
+                <a:spcPts val="1200"/>
+              </a:spcAft>
+            </a:pPr>
+            <a:r>
+              <a:rPr sz="1500">
+                <a:solidFill>
+                  <a:srgbClr val="1B222D"/>
+                </a:solidFill>
+                <a:latin typeface="Calibri"/>
+              </a:rPr>
+              <a:t>›  Con stride 4: casi el mismo CER en un tercio del tiempo.</a:t>
+            </a:r>
+          </a:p>
+          <a:p>
+            <a:pPr>
+              <a:lnSpc>
+                <a:spcPct val="108000"/>
+              </a:lnSpc>
+              <a:spcAft>
+                <a:spcPts val="1200"/>
+              </a:spcAft>
+            </a:pPr>
+            <a:r>
+              <a:rPr sz="1500">
+                <a:solidFill>
+                  <a:srgbClr val="1B222D"/>
+                </a:solidFill>
+                <a:latin typeface="Calibri"/>
+              </a:rPr>
+              <a:t>›  CER validación 0.552 · prueba 0.490.</a:t>
+            </a:r>
+          </a:p>
+          <a:p>
+            <a:pPr>
+              <a:lnSpc>
+                <a:spcPct val="108000"/>
+              </a:lnSpc>
+              <a:spcAft>
+                <a:spcPts val="1200"/>
+              </a:spcAft>
+            </a:pPr>
+            <a:r>
+              <a:rPr sz="1500">
+                <a:solidFill>
+                  <a:srgbClr val="1B222D"/>
+                </a:solidFill>
+                <a:latin typeface="Calibri"/>
+              </a:rPr>
+              <a:t>›  1.70 M parámetros, 60 épocas.</a:t>
+            </a:r>
+          </a:p>
+        </p:txBody>
+      </p:sp>
+      <p:sp>
+        <p:nvSpPr>
+          <p:cNvPr id="9" name="TextBox 8"/>
+          <p:cNvSpPr txBox="1"/>
+          <p:nvPr/>
+        </p:nvSpPr>
+        <p:spPr>
+          <a:xfrm>
+            <a:off x="11551615" y="6446520"/>
+            <a:ext cx="457200" cy="320040"/>
+          </a:xfrm>
+          <a:prstGeom prst="rect">
+            <a:avLst/>
+          </a:prstGeom>
+          <a:noFill/>
+        </p:spPr>
+        <p:txBody>
+          <a:bodyPr wrap="square" anchor="t" lIns="0" rIns="0" tIns="0" bIns="0">
+            <a:spAutoFit/>
+          </a:bodyPr>
+          <a:lstStyle/>
+          <a:p>
+            <a:pPr algn="r">
+              <a:lnSpc>
+                <a:spcPct val="100000"/>
+              </a:lnSpc>
+            </a:pPr>
+            <a:r>
+              <a:rPr sz="1100" b="0" i="0">
+                <a:solidFill>
+                  <a:srgbClr val="5B6B7C"/>
+                </a:solidFill>
+                <a:latin typeface="Calibri"/>
+              </a:rPr>
+              <a:t>21</a:t>
+            </a:r>
+          </a:p>
+        </p:txBody>
+      </p:sp>
+    </p:spTree>
+  </p:cSld>
+  <p:clrMapOvr>
+    <a:masterClrMapping/>
+  </p:clrMapOvr>
+</p:sld>
+</file>
+
+<file path=ppt/slides/slide22.xml><?xml version="1.0" encoding="utf-8"?>
+<p:sld xmlns:a="http://schemas.openxmlformats.org/drawingml/2006/main" xmlns:p="http://schemas.openxmlformats.org/presentationml/2006/main" xmlns:r="http://schemas.openxmlformats.org/officeDocument/2006/relationships">
+  <p:cSld>
+    <p:spTree>
+      <p:nvGrpSpPr>
+        <p:cNvPr id="1" name=""/>
+        <p:cNvGrpSpPr/>
+        <p:nvPr/>
+      </p:nvGrpSpPr>
+      <p:grpSpPr/>
+      <p:sp>
+        <p:nvSpPr>
+          <p:cNvPr id="2" name="Rectangle 1"/>
+          <p:cNvSpPr/>
+          <p:nvPr/>
+        </p:nvSpPr>
+        <p:spPr>
+          <a:xfrm>
+            <a:off x="0" y="0"/>
+            <a:ext cx="12191695" cy="6858000"/>
+          </a:xfrm>
+          <a:prstGeom prst="rect">
+            <a:avLst/>
+          </a:prstGeom>
+          <a:solidFill>
+            <a:srgbClr val="F6F8FA"/>
+          </a:solidFill>
+          <a:ln>
+            <a:noFill/>
+          </a:ln>
+          <a:effectLst/>
+        </p:spPr>
+        <p:style>
+          <a:lnRef idx="1">
+            <a:schemeClr val="accent1"/>
+          </a:lnRef>
+          <a:fillRef idx="3">
+            <a:schemeClr val="accent1"/>
+          </a:fillRef>
+          <a:effectRef idx="2">
+            <a:schemeClr val="accent1"/>
+          </a:effectRef>
+          <a:fontRef idx="minor">
+            <a:schemeClr val="lt1"/>
+          </a:fontRef>
+        </p:style>
+        <p:txBody>
+          <a:bodyPr rtlCol="0" anchor="ctr"/>
+          <a:lstStyle/>
+          <a:p>
+            <a:pPr algn="ctr"/>
+          </a:p>
+        </p:txBody>
+      </p:sp>
+      <p:sp>
+        <p:nvSpPr>
+          <p:cNvPr id="3" name="Rectangle 2"/>
+          <p:cNvSpPr/>
+          <p:nvPr/>
+        </p:nvSpPr>
+        <p:spPr>
+          <a:xfrm>
+            <a:off x="0" y="0"/>
+            <a:ext cx="12191695" cy="1234440"/>
+          </a:xfrm>
+          <a:prstGeom prst="rect">
+            <a:avLst/>
+          </a:prstGeom>
+          <a:solidFill>
+            <a:srgbClr val="0F1E33"/>
+          </a:solidFill>
+          <a:ln>
+            <a:noFill/>
+          </a:ln>
+          <a:effectLst/>
+        </p:spPr>
+        <p:style>
+          <a:lnRef idx="1">
+            <a:schemeClr val="accent1"/>
+          </a:lnRef>
+          <a:fillRef idx="3">
+            <a:schemeClr val="accent1"/>
+          </a:fillRef>
+          <a:effectRef idx="2">
+            <a:schemeClr val="accent1"/>
+          </a:effectRef>
+          <a:fontRef idx="minor">
+            <a:schemeClr val="lt1"/>
+          </a:fontRef>
+        </p:style>
+        <p:txBody>
+          <a:bodyPr rtlCol="0" anchor="ctr"/>
+          <a:lstStyle/>
+          <a:p>
+            <a:pPr algn="ctr"/>
+          </a:p>
+        </p:txBody>
+      </p:sp>
+      <p:sp>
+        <p:nvSpPr>
+          <p:cNvPr id="4" name="Rectangle 3"/>
+          <p:cNvSpPr/>
+          <p:nvPr/>
+        </p:nvSpPr>
+        <p:spPr>
+          <a:xfrm>
+            <a:off x="548640" y="384048"/>
+            <a:ext cx="320040" cy="54864"/>
+          </a:xfrm>
+          <a:prstGeom prst="rect">
+            <a:avLst/>
+          </a:prstGeom>
+          <a:solidFill>
+            <a:srgbClr val="2CA6A4"/>
+          </a:solidFill>
+          <a:ln>
+            <a:noFill/>
+          </a:ln>
+          <a:effectLst/>
+        </p:spPr>
+        <p:style>
+          <a:lnRef idx="1">
+            <a:schemeClr val="accent1"/>
+          </a:lnRef>
+          <a:fillRef idx="3">
+            <a:schemeClr val="accent1"/>
+          </a:fillRef>
+          <a:effectRef idx="2">
+            <a:schemeClr val="accent1"/>
+          </a:effectRef>
+          <a:fontRef idx="minor">
+            <a:schemeClr val="lt1"/>
+          </a:fontRef>
+        </p:style>
+        <p:txBody>
+          <a:bodyPr rtlCol="0" anchor="ctr"/>
+          <a:lstStyle/>
+          <a:p>
+            <a:pPr algn="ctr"/>
+          </a:p>
+        </p:txBody>
+      </p:sp>
+      <p:sp>
+        <p:nvSpPr>
+          <p:cNvPr id="5" name="TextBox 4"/>
+          <p:cNvSpPr txBox="1"/>
+          <p:nvPr/>
+        </p:nvSpPr>
+        <p:spPr>
+          <a:xfrm>
+            <a:off x="960120" y="274320"/>
+            <a:ext cx="8229600" cy="274320"/>
+          </a:xfrm>
+          <a:prstGeom prst="rect">
+            <a:avLst/>
+          </a:prstGeom>
+          <a:noFill/>
+        </p:spPr>
+        <p:txBody>
+          <a:bodyPr wrap="square" anchor="t" lIns="0" rIns="0" tIns="0" bIns="0">
+            <a:spAutoFit/>
+          </a:bodyPr>
+          <a:lstStyle/>
+          <a:p>
+            <a:pPr algn="l">
+              <a:lnSpc>
+                <a:spcPct val="100000"/>
+              </a:lnSpc>
+            </a:pPr>
+            <a:r>
+              <a:rPr sz="1200" b="1" i="0">
+                <a:solidFill>
+                  <a:srgbClr val="2CA6A4"/>
+                </a:solidFill>
+                <a:latin typeface="Calibri"/>
+              </a:rPr>
+              <a:t>RESULTADOS · MAYOR TECHO</a:t>
+            </a:r>
+          </a:p>
+        </p:txBody>
+      </p:sp>
+      <p:sp>
+        <p:nvSpPr>
+          <p:cNvPr id="6" name="TextBox 5"/>
+          <p:cNvSpPr txBox="1"/>
+          <p:nvPr/>
+        </p:nvSpPr>
+        <p:spPr>
+          <a:xfrm>
+            <a:off x="548640" y="548640"/>
+            <a:ext cx="10515600" cy="640080"/>
+          </a:xfrm>
+          <a:prstGeom prst="rect">
+            <a:avLst/>
+          </a:prstGeom>
+          <a:noFill/>
+        </p:spPr>
+        <p:txBody>
+          <a:bodyPr wrap="square" anchor="t" lIns="0" rIns="0" tIns="0" bIns="0">
+            <a:spAutoFit/>
+          </a:bodyPr>
+          <a:lstStyle/>
+          <a:p>
+            <a:pPr algn="l">
+              <a:lnSpc>
+                <a:spcPct val="100000"/>
+              </a:lnSpc>
+            </a:pPr>
+            <a:r>
+              <a:rPr sz="2500" b="1" i="0">
+                <a:solidFill>
+                  <a:srgbClr val="FFFFFF"/>
+                </a:solidFill>
+                <a:latin typeface="Calibri"/>
+              </a:rPr>
+              <a:t>Transformer: ajuste de hiperparámetros</a:t>
+            </a:r>
+          </a:p>
+        </p:txBody>
+      </p:sp>
+      <p:pic>
+        <p:nvPicPr>
+          <p:cNvPr id="7" name="Picture 6" descr="10_transformer_tuning.png"/>
+          <p:cNvPicPr>
+            <a:picLocks noChangeAspect="1"/>
+          </p:cNvPicPr>
+          <p:nvPr/>
+        </p:nvPicPr>
+        <p:blipFill>
+          <a:blip r:embed="rId2"/>
+          <a:stretch>
+            <a:fillRect/>
+          </a:stretch>
+        </p:blipFill>
+        <p:spPr>
+          <a:xfrm>
+            <a:off x="457200" y="2004934"/>
+            <a:ext cx="6949440" cy="3945411"/>
+          </a:xfrm>
+          <a:prstGeom prst="rect">
+            <a:avLst/>
+          </a:prstGeom>
+        </p:spPr>
+      </p:pic>
+      <p:sp>
+        <p:nvSpPr>
+          <p:cNvPr id="8" name="TextBox 7"/>
+          <p:cNvSpPr txBox="1"/>
+          <p:nvPr/>
+        </p:nvSpPr>
+        <p:spPr>
+          <a:xfrm>
+            <a:off x="7680960" y="1737360"/>
+            <a:ext cx="4023360" cy="4572000"/>
+          </a:xfrm>
+          <a:prstGeom prst="rect">
+            <a:avLst/>
+          </a:prstGeom>
+          <a:noFill/>
+        </p:spPr>
+        <p:txBody>
+          <a:bodyPr wrap="square" lIns="0" rIns="0">
+            <a:spAutoFit/>
+          </a:bodyPr>
+          <a:lstStyle/>
+          <a:p>
+            <a:pPr>
+              <a:lnSpc>
+                <a:spcPct val="108000"/>
+              </a:lnSpc>
+              <a:spcAft>
+                <a:spcPts val="1200"/>
+              </a:spcAft>
+            </a:pPr>
+            <a:r>
+              <a:rPr sz="1500">
+                <a:solidFill>
+                  <a:srgbClr val="1B222D"/>
+                </a:solidFill>
+                <a:latin typeface="Calibri"/>
+              </a:rPr>
+              <a:t>›  Lo que acelera el aprendizaje ayudó más (dropout 0.1, lr 0.003) que agregar capas o ancho.</a:t>
+            </a:r>
+          </a:p>
+          <a:p>
+            <a:pPr>
+              <a:lnSpc>
+                <a:spcPct val="108000"/>
+              </a:lnSpc>
+              <a:spcAft>
+                <a:spcPts val="1200"/>
+              </a:spcAft>
+            </a:pPr>
+            <a:r>
+              <a:rPr sz="1500">
+                <a:solidFill>
+                  <a:srgbClr val="1B222D"/>
+                </a:solidFill>
+                <a:latin typeface="Calibri"/>
+              </a:rPr>
+              <a:t>›  Con stride 4: casi el mismo CER (0.588) en 7.5 min en vez de 18.</a:t>
+            </a:r>
+          </a:p>
+          <a:p>
+            <a:pPr>
+              <a:lnSpc>
+                <a:spcPct val="108000"/>
+              </a:lnSpc>
+              <a:spcAft>
+                <a:spcPts val="1200"/>
+              </a:spcAft>
+            </a:pPr>
+            <a:r>
+              <a:rPr sz="1500">
+                <a:solidFill>
+                  <a:srgbClr val="1B222D"/>
+                </a:solidFill>
+                <a:latin typeface="Calibri"/>
+              </a:rPr>
+              <a:t>›  Empata con el CNN-BiGRU (Wilcoxon p = 0.21) con 37 % de sus parámetros y 3 veces más rápido al predecir.</a:t>
+            </a:r>
+          </a:p>
+          <a:p>
+            <a:pPr>
+              <a:lnSpc>
+                <a:spcPct val="108000"/>
+              </a:lnSpc>
+              <a:spcAft>
+                <a:spcPts val="1200"/>
+              </a:spcAft>
+            </a:pPr>
+            <a:r>
+              <a:rPr sz="1500">
+                <a:solidFill>
+                  <a:srgbClr val="1B222D"/>
+                </a:solidFill>
+                <a:latin typeface="Calibri"/>
+              </a:rPr>
+              <a:t>›  CER validación 0.584 · prueba 0.499.</a:t>
+            </a:r>
+          </a:p>
+          <a:p>
+            <a:pPr>
+              <a:lnSpc>
+                <a:spcPct val="108000"/>
+              </a:lnSpc>
+              <a:spcAft>
+                <a:spcPts val="1200"/>
+              </a:spcAft>
+            </a:pPr>
+            <a:r>
+              <a:rPr sz="1500">
+                <a:solidFill>
+                  <a:srgbClr val="1B222D"/>
+                </a:solidFill>
+                <a:latin typeface="Calibri"/>
+              </a:rPr>
+              <a:t>›  0.63 M parámetros, 60 épocas.</a:t>
+            </a:r>
+          </a:p>
+        </p:txBody>
+      </p:sp>
+      <p:sp>
+        <p:nvSpPr>
+          <p:cNvPr id="9" name="TextBox 8"/>
+          <p:cNvSpPr txBox="1"/>
+          <p:nvPr/>
+        </p:nvSpPr>
+        <p:spPr>
+          <a:xfrm>
+            <a:off x="11551615" y="6446520"/>
+            <a:ext cx="457200" cy="320040"/>
+          </a:xfrm>
+          <a:prstGeom prst="rect">
+            <a:avLst/>
+          </a:prstGeom>
+          <a:noFill/>
+        </p:spPr>
+        <p:txBody>
+          <a:bodyPr wrap="square" anchor="t" lIns="0" rIns="0" tIns="0" bIns="0">
+            <a:spAutoFit/>
+          </a:bodyPr>
+          <a:lstStyle/>
+          <a:p>
+            <a:pPr algn="r">
+              <a:lnSpc>
+                <a:spcPct val="100000"/>
+              </a:lnSpc>
+            </a:pPr>
+            <a:r>
+              <a:rPr sz="1100" b="0" i="0">
+                <a:solidFill>
+                  <a:srgbClr val="5B6B7C"/>
+                </a:solidFill>
+                <a:latin typeface="Calibri"/>
+              </a:rPr>
+              <a:t>22</a:t>
+            </a:r>
+          </a:p>
+        </p:txBody>
+      </p:sp>
+    </p:spTree>
+  </p:cSld>
+  <p:clrMapOvr>
+    <a:masterClrMapping/>
+  </p:clrMapOvr>
+</p:sld>
+</file>
+
+<file path=ppt/slides/slide23.xml><?xml version="1.0" encoding="utf-8"?>
+<p:sld xmlns:a="http://schemas.openxmlformats.org/drawingml/2006/main" xmlns:p="http://schemas.openxmlformats.org/presentationml/2006/main" xmlns:r="http://schemas.openxmlformats.org/officeDocument/2006/relationships">
+  <p:cSld>
+    <p:spTree>
+      <p:nvGrpSpPr>
+        <p:cNvPr id="1" name=""/>
+        <p:cNvGrpSpPr/>
+        <p:nvPr/>
+      </p:nvGrpSpPr>
+      <p:grpSpPr/>
+      <p:sp>
+        <p:nvSpPr>
+          <p:cNvPr id="2" name="Rectangle 1"/>
+          <p:cNvSpPr/>
+          <p:nvPr/>
+        </p:nvSpPr>
+        <p:spPr>
+          <a:xfrm>
+            <a:off x="0" y="0"/>
+            <a:ext cx="12191695" cy="6858000"/>
+          </a:xfrm>
+          <a:prstGeom prst="rect">
+            <a:avLst/>
+          </a:prstGeom>
+          <a:solidFill>
+            <a:srgbClr val="F6F8FA"/>
+          </a:solidFill>
+          <a:ln>
+            <a:noFill/>
+          </a:ln>
+          <a:effectLst/>
+        </p:spPr>
+        <p:style>
+          <a:lnRef idx="1">
+            <a:schemeClr val="accent1"/>
+          </a:lnRef>
+          <a:fillRef idx="3">
+            <a:schemeClr val="accent1"/>
+          </a:fillRef>
+          <a:effectRef idx="2">
+            <a:schemeClr val="accent1"/>
+          </a:effectRef>
+          <a:fontRef idx="minor">
+            <a:schemeClr val="lt1"/>
+          </a:fontRef>
+        </p:style>
+        <p:txBody>
+          <a:bodyPr rtlCol="0" anchor="ctr"/>
+          <a:lstStyle/>
+          <a:p>
+            <a:pPr algn="ctr"/>
+          </a:p>
+        </p:txBody>
+      </p:sp>
+      <p:sp>
+        <p:nvSpPr>
+          <p:cNvPr id="3" name="Rectangle 2"/>
+          <p:cNvSpPr/>
+          <p:nvPr/>
+        </p:nvSpPr>
+        <p:spPr>
+          <a:xfrm>
+            <a:off x="0" y="0"/>
+            <a:ext cx="12191695" cy="1234440"/>
+          </a:xfrm>
+          <a:prstGeom prst="rect">
+            <a:avLst/>
+          </a:prstGeom>
+          <a:solidFill>
+            <a:srgbClr val="0F1E33"/>
+          </a:solidFill>
+          <a:ln>
+            <a:noFill/>
+          </a:ln>
+          <a:effectLst/>
+        </p:spPr>
+        <p:style>
+          <a:lnRef idx="1">
+            <a:schemeClr val="accent1"/>
+          </a:lnRef>
+          <a:fillRef idx="3">
+            <a:schemeClr val="accent1"/>
+          </a:fillRef>
+          <a:effectRef idx="2">
+            <a:schemeClr val="accent1"/>
+          </a:effectRef>
+          <a:fontRef idx="minor">
+            <a:schemeClr val="lt1"/>
+          </a:fontRef>
+        </p:style>
+        <p:txBody>
+          <a:bodyPr rtlCol="0" anchor="ctr"/>
+          <a:lstStyle/>
+          <a:p>
+            <a:pPr algn="ctr"/>
+          </a:p>
+        </p:txBody>
+      </p:sp>
+      <p:sp>
+        <p:nvSpPr>
+          <p:cNvPr id="4" name="Rectangle 3"/>
+          <p:cNvSpPr/>
+          <p:nvPr/>
+        </p:nvSpPr>
+        <p:spPr>
+          <a:xfrm>
+            <a:off x="548640" y="384048"/>
+            <a:ext cx="320040" cy="54864"/>
+          </a:xfrm>
+          <a:prstGeom prst="rect">
+            <a:avLst/>
+          </a:prstGeom>
+          <a:solidFill>
+            <a:srgbClr val="2CA6A4"/>
+          </a:solidFill>
+          <a:ln>
+            <a:noFill/>
+          </a:ln>
+          <a:effectLst/>
+        </p:spPr>
+        <p:style>
+          <a:lnRef idx="1">
+            <a:schemeClr val="accent1"/>
+          </a:lnRef>
+          <a:fillRef idx="3">
+            <a:schemeClr val="accent1"/>
+          </a:fillRef>
+          <a:effectRef idx="2">
+            <a:schemeClr val="accent1"/>
+          </a:effectRef>
+          <a:fontRef idx="minor">
+            <a:schemeClr val="lt1"/>
+          </a:fontRef>
+        </p:style>
+        <p:txBody>
+          <a:bodyPr rtlCol="0" anchor="ctr"/>
+          <a:lstStyle/>
+          <a:p>
+            <a:pPr algn="ctr"/>
+          </a:p>
+        </p:txBody>
+      </p:sp>
+      <p:sp>
+        <p:nvSpPr>
+          <p:cNvPr id="5" name="TextBox 4"/>
+          <p:cNvSpPr txBox="1"/>
+          <p:nvPr/>
+        </p:nvSpPr>
+        <p:spPr>
+          <a:xfrm>
+            <a:off x="960120" y="274320"/>
+            <a:ext cx="8229600" cy="274320"/>
+          </a:xfrm>
+          <a:prstGeom prst="rect">
+            <a:avLst/>
+          </a:prstGeom>
+          <a:noFill/>
+        </p:spPr>
+        <p:txBody>
+          <a:bodyPr wrap="square" anchor="t" lIns="0" rIns="0" tIns="0" bIns="0">
+            <a:spAutoFit/>
+          </a:bodyPr>
+          <a:lstStyle/>
+          <a:p>
+            <a:pPr algn="l">
+              <a:lnSpc>
+                <a:spcPct val="100000"/>
+              </a:lnSpc>
+            </a:pPr>
+            <a:r>
+              <a:rPr sz="1200" b="1" i="0">
+                <a:solidFill>
+                  <a:srgbClr val="2CA6A4"/>
+                </a:solidFill>
+                <a:latin typeface="Calibri"/>
+              </a:rPr>
+              <a:t>RESULTADOS</a:t>
+            </a:r>
+          </a:p>
+        </p:txBody>
+      </p:sp>
+      <p:sp>
+        <p:nvSpPr>
+          <p:cNvPr id="6" name="TextBox 5"/>
+          <p:cNvSpPr txBox="1"/>
+          <p:nvPr/>
+        </p:nvSpPr>
+        <p:spPr>
+          <a:xfrm>
+            <a:off x="548640" y="548640"/>
+            <a:ext cx="10515600" cy="640080"/>
+          </a:xfrm>
+          <a:prstGeom prst="rect">
+            <a:avLst/>
+          </a:prstGeom>
+          <a:noFill/>
+        </p:spPr>
+        <p:txBody>
+          <a:bodyPr wrap="square" anchor="t" lIns="0" rIns="0" tIns="0" bIns="0">
+            <a:spAutoFit/>
+          </a:bodyPr>
+          <a:lstStyle/>
+          <a:p>
+            <a:pPr algn="l">
+              <a:lnSpc>
+                <a:spcPct val="100000"/>
+              </a:lnSpc>
+            </a:pPr>
+            <a:r>
+              <a:rPr sz="2500" b="1" i="0">
+                <a:solidFill>
+                  <a:srgbClr val="FFFFFF"/>
+                </a:solidFill>
+                <a:latin typeface="Calibri"/>
+              </a:rPr>
+              <a:t>Qué caracteres fallan: el desbalance del EDA se nota</a:t>
+            </a:r>
+          </a:p>
+        </p:txBody>
+      </p:sp>
+      <p:sp>
+        <p:nvSpPr>
+          <p:cNvPr id="7" name="TextBox 6"/>
+          <p:cNvSpPr txBox="1"/>
+          <p:nvPr/>
+        </p:nvSpPr>
+        <p:spPr>
+          <a:xfrm>
+            <a:off x="548640" y="1417320"/>
+            <a:ext cx="5577840" cy="365760"/>
+          </a:xfrm>
+          <a:prstGeom prst="rect">
+            <a:avLst/>
+          </a:prstGeom>
+          <a:noFill/>
+        </p:spPr>
+        <p:txBody>
+          <a:bodyPr wrap="square" anchor="t" lIns="0" rIns="0" tIns="0" bIns="0">
+            <a:spAutoFit/>
+          </a:bodyPr>
+          <a:lstStyle/>
+          <a:p>
+            <a:pPr algn="ctr">
+              <a:lnSpc>
+                <a:spcPct val="100000"/>
+              </a:lnSpc>
+            </a:pPr>
+            <a:r>
+              <a:rPr sz="1500" b="1" i="0">
+                <a:solidFill>
+                  <a:srgbClr val="1B222D"/>
+                </a:solidFill>
+                <a:latin typeface="Calibri"/>
+              </a:rPr>
+              <a:t>CNN-BiGRU</a:t>
+            </a:r>
+          </a:p>
+        </p:txBody>
+      </p:sp>
+      <p:pic>
+        <p:nvPicPr>
+          <p:cNvPr id="8" name="Picture 7" descr="07_cnn_bigru_error_por_caracter.png"/>
+          <p:cNvPicPr>
+            <a:picLocks noChangeAspect="1"/>
+          </p:cNvPicPr>
+          <p:nvPr/>
+        </p:nvPicPr>
+        <p:blipFill>
+          <a:blip r:embed="rId2"/>
+          <a:stretch>
+            <a:fillRect/>
+          </a:stretch>
+        </p:blipFill>
+        <p:spPr>
+          <a:xfrm>
+            <a:off x="548640" y="1975779"/>
+            <a:ext cx="5394960" cy="3729401"/>
+          </a:xfrm>
+          <a:prstGeom prst="rect">
+            <a:avLst/>
+          </a:prstGeom>
+        </p:spPr>
+      </p:pic>
+      <p:sp>
+        <p:nvSpPr>
+          <p:cNvPr id="9" name="TextBox 8"/>
+          <p:cNvSpPr txBox="1"/>
+          <p:nvPr/>
+        </p:nvSpPr>
+        <p:spPr>
+          <a:xfrm>
+            <a:off x="6126480" y="1417320"/>
+            <a:ext cx="5577840" cy="365760"/>
+          </a:xfrm>
+          <a:prstGeom prst="rect">
+            <a:avLst/>
+          </a:prstGeom>
+          <a:noFill/>
+        </p:spPr>
+        <p:txBody>
+          <a:bodyPr wrap="square" anchor="t" lIns="0" rIns="0" tIns="0" bIns="0">
+            <a:spAutoFit/>
+          </a:bodyPr>
+          <a:lstStyle/>
+          <a:p>
+            <a:pPr algn="ctr">
+              <a:lnSpc>
+                <a:spcPct val="100000"/>
+              </a:lnSpc>
+            </a:pPr>
+            <a:r>
+              <a:rPr sz="1500" b="1" i="0">
+                <a:solidFill>
+                  <a:srgbClr val="1B222D"/>
+                </a:solidFill>
+                <a:latin typeface="Calibri"/>
+              </a:rPr>
+              <a:t>Transformer</a:t>
+            </a:r>
+          </a:p>
+        </p:txBody>
+      </p:sp>
+      <p:pic>
+        <p:nvPicPr>
+          <p:cNvPr id="10" name="Picture 9" descr="10_transformer_error_por_caracter.png"/>
+          <p:cNvPicPr>
+            <a:picLocks noChangeAspect="1"/>
+          </p:cNvPicPr>
+          <p:nvPr/>
+        </p:nvPicPr>
+        <p:blipFill>
+          <a:blip r:embed="rId3"/>
+          <a:stretch>
+            <a:fillRect/>
+          </a:stretch>
+        </p:blipFill>
+        <p:spPr>
+          <a:xfrm>
+            <a:off x="6126480" y="1991297"/>
+            <a:ext cx="5394960" cy="3698366"/>
+          </a:xfrm>
+          <a:prstGeom prst="rect">
+            <a:avLst/>
+          </a:prstGeom>
+        </p:spPr>
+      </p:pic>
+      <p:sp>
+        <p:nvSpPr>
+          <p:cNvPr id="11" name="TextBox 10"/>
+          <p:cNvSpPr txBox="1"/>
+          <p:nvPr/>
+        </p:nvSpPr>
+        <p:spPr>
+          <a:xfrm>
+            <a:off x="640080" y="5943600"/>
+            <a:ext cx="10972800" cy="640080"/>
+          </a:xfrm>
+          <a:prstGeom prst="rect">
+            <a:avLst/>
+          </a:prstGeom>
+          <a:noFill/>
+        </p:spPr>
+        <p:txBody>
+          <a:bodyPr wrap="square" anchor="t" lIns="0" rIns="0" tIns="0" bIns="0">
+            <a:spAutoFit/>
+          </a:bodyPr>
+          <a:lstStyle/>
+          <a:p>
+            <a:pPr algn="l">
+              <a:lnSpc>
+                <a:spcPct val="100000"/>
+              </a:lnSpc>
+            </a:pPr>
+            <a:r>
+              <a:rPr sz="1500" b="0" i="0">
+                <a:solidFill>
+                  <a:srgbClr val="5B6B7C"/>
+                </a:solidFill>
+                <a:latin typeface="Calibri"/>
+              </a:rPr>
+              <a:t>Los caracteres raros en entrenamiento (q, x, z, j) se fallan casi siempre; la cobertura de mano es lo que más explica el error de cada secuencia.</a:t>
+            </a:r>
+          </a:p>
+        </p:txBody>
+      </p:sp>
+      <p:sp>
+        <p:nvSpPr>
+          <p:cNvPr id="12" name="TextBox 11"/>
+          <p:cNvSpPr txBox="1"/>
+          <p:nvPr/>
+        </p:nvSpPr>
+        <p:spPr>
+          <a:xfrm>
+            <a:off x="11551615" y="6446520"/>
+            <a:ext cx="457200" cy="320040"/>
+          </a:xfrm>
+          <a:prstGeom prst="rect">
+            <a:avLst/>
+          </a:prstGeom>
+          <a:noFill/>
+        </p:spPr>
+        <p:txBody>
+          <a:bodyPr wrap="square" anchor="t" lIns="0" rIns="0" tIns="0" bIns="0">
+            <a:spAutoFit/>
+          </a:bodyPr>
+          <a:lstStyle/>
+          <a:p>
+            <a:pPr algn="r">
+              <a:lnSpc>
+                <a:spcPct val="100000"/>
+              </a:lnSpc>
+            </a:pPr>
+            <a:r>
+              <a:rPr sz="1100" b="0" i="0">
+                <a:solidFill>
+                  <a:srgbClr val="5B6B7C"/>
+                </a:solidFill>
+                <a:latin typeface="Calibri"/>
+              </a:rPr>
+              <a:t>23</a:t>
+            </a:r>
+          </a:p>
+        </p:txBody>
+      </p:sp>
+    </p:spTree>
+  </p:cSld>
+  <p:clrMapOvr>
+    <a:masterClrMapping/>
+  </p:clrMapOvr>
+</p:sld>
+</file>
+
+<file path=ppt/slides/slide24.xml><?xml version="1.0" encoding="utf-8"?>
+<p:sld xmlns:a="http://schemas.openxmlformats.org/drawingml/2006/main" xmlns:p="http://schemas.openxmlformats.org/presentationml/2006/main" xmlns:r="http://schemas.openxmlformats.org/officeDocument/2006/relationships">
+  <p:cSld>
+    <p:spTree>
+      <p:nvGrpSpPr>
+        <p:cNvPr id="1" name=""/>
+        <p:cNvGrpSpPr/>
+        <p:nvPr/>
+      </p:nvGrpSpPr>
+      <p:grpSpPr/>
+      <p:sp>
+        <p:nvSpPr>
+          <p:cNvPr id="2" name="Rectangle 1"/>
+          <p:cNvSpPr/>
+          <p:nvPr/>
+        </p:nvSpPr>
+        <p:spPr>
+          <a:xfrm>
+            <a:off x="0" y="0"/>
+            <a:ext cx="12191695" cy="6858000"/>
+          </a:xfrm>
+          <a:prstGeom prst="rect">
+            <a:avLst/>
+          </a:prstGeom>
+          <a:solidFill>
+            <a:srgbClr val="172A45"/>
+          </a:solidFill>
+          <a:ln>
+            <a:noFill/>
+          </a:ln>
+          <a:effectLst/>
+        </p:spPr>
+        <p:style>
+          <a:lnRef idx="1">
+            <a:schemeClr val="accent1"/>
+          </a:lnRef>
+          <a:fillRef idx="3">
+            <a:schemeClr val="accent1"/>
+          </a:fillRef>
+          <a:effectRef idx="2">
+            <a:schemeClr val="accent1"/>
+          </a:effectRef>
+          <a:fontRef idx="minor">
+            <a:schemeClr val="lt1"/>
+          </a:fontRef>
+        </p:style>
+        <p:txBody>
+          <a:bodyPr rtlCol="0" anchor="ctr"/>
+          <a:lstStyle/>
+          <a:p>
+            <a:pPr algn="ctr"/>
+          </a:p>
+        </p:txBody>
+      </p:sp>
+      <p:sp>
+        <p:nvSpPr>
+          <p:cNvPr id="3" name="Rectangle 2"/>
+          <p:cNvSpPr/>
+          <p:nvPr/>
+        </p:nvSpPr>
+        <p:spPr>
+          <a:xfrm>
+            <a:off x="0" y="0"/>
+            <a:ext cx="256032" cy="6858000"/>
+          </a:xfrm>
+          <a:prstGeom prst="rect">
+            <a:avLst/>
+          </a:prstGeom>
+          <a:solidFill>
+            <a:srgbClr val="F28C28"/>
+          </a:solidFill>
+          <a:ln>
+            <a:noFill/>
+          </a:ln>
+          <a:effectLst/>
+        </p:spPr>
+        <p:style>
+          <a:lnRef idx="1">
+            <a:schemeClr val="accent1"/>
+          </a:lnRef>
+          <a:fillRef idx="3">
+            <a:schemeClr val="accent1"/>
+          </a:fillRef>
+          <a:effectRef idx="2">
+            <a:schemeClr val="accent1"/>
+          </a:effectRef>
+          <a:fontRef idx="minor">
+            <a:schemeClr val="lt1"/>
+          </a:fontRef>
+        </p:style>
+        <p:txBody>
+          <a:bodyPr rtlCol="0" anchor="ctr"/>
+          <a:lstStyle/>
+          <a:p>
+            <a:pPr algn="ctr"/>
+          </a:p>
+        </p:txBody>
+      </p:sp>
+      <p:sp>
+        <p:nvSpPr>
+          <p:cNvPr id="4" name="TextBox 3"/>
+          <p:cNvSpPr txBox="1"/>
+          <p:nvPr/>
+        </p:nvSpPr>
+        <p:spPr>
+          <a:xfrm>
+            <a:off x="822960" y="2286000"/>
+            <a:ext cx="2743200" cy="1188720"/>
+          </a:xfrm>
+          <a:prstGeom prst="rect">
+            <a:avLst/>
+          </a:prstGeom>
+          <a:noFill/>
+        </p:spPr>
+        <p:txBody>
+          <a:bodyPr wrap="square" anchor="t" lIns="0" rIns="0" tIns="0" bIns="0">
+            <a:spAutoFit/>
+          </a:bodyPr>
+          <a:lstStyle/>
+          <a:p>
+            <a:pPr algn="l">
+              <a:lnSpc>
+                <a:spcPct val="100000"/>
+              </a:lnSpc>
+            </a:pPr>
+            <a:r>
+              <a:rPr sz="6400" b="1" i="0">
+                <a:solidFill>
+                  <a:srgbClr val="2CA6A4"/>
+                </a:solidFill>
+                <a:latin typeface="Calibri"/>
+              </a:rPr>
+              <a:t/>
+            </a:r>
+          </a:p>
+        </p:txBody>
+      </p:sp>
+      <p:sp>
+        <p:nvSpPr>
+          <p:cNvPr id="5" name="TextBox 4"/>
+          <p:cNvSpPr txBox="1"/>
+          <p:nvPr/>
+        </p:nvSpPr>
+        <p:spPr>
+          <a:xfrm>
+            <a:off x="822960" y="3383280"/>
+            <a:ext cx="10058400" cy="1097280"/>
+          </a:xfrm>
+          <a:prstGeom prst="rect">
+            <a:avLst/>
+          </a:prstGeom>
+          <a:noFill/>
+        </p:spPr>
+        <p:txBody>
+          <a:bodyPr wrap="square" anchor="t" lIns="0" rIns="0" tIns="0" bIns="0">
+            <a:spAutoFit/>
+          </a:bodyPr>
+          <a:lstStyle/>
+          <a:p>
+            <a:pPr algn="l">
+              <a:lnSpc>
+                <a:spcPct val="100000"/>
+              </a:lnSpc>
+            </a:pPr>
+            <a:r>
+              <a:rPr sz="3400" b="1" i="0">
+                <a:solidFill>
+                  <a:srgbClr val="FFFFFF"/>
+                </a:solidFill>
+                <a:latin typeface="Calibri"/>
+              </a:rPr>
+              <a:t>La app</a:t>
+            </a:r>
+          </a:p>
+        </p:txBody>
+      </p:sp>
+      <p:sp>
+        <p:nvSpPr>
+          <p:cNvPr id="6" name="TextBox 5"/>
+          <p:cNvSpPr txBox="1"/>
+          <p:nvPr/>
+        </p:nvSpPr>
+        <p:spPr>
+          <a:xfrm>
+            <a:off x="822960" y="4206240"/>
+            <a:ext cx="9601200" cy="731520"/>
+          </a:xfrm>
+          <a:prstGeom prst="rect">
+            <a:avLst/>
+          </a:prstGeom>
+          <a:noFill/>
+        </p:spPr>
+        <p:txBody>
+          <a:bodyPr wrap="square" anchor="t" lIns="0" rIns="0" tIns="0" bIns="0">
+            <a:spAutoFit/>
+          </a:bodyPr>
+          <a:lstStyle/>
+          <a:p>
+            <a:pPr algn="l">
+              <a:lnSpc>
+                <a:spcPct val="100000"/>
+              </a:lnSpc>
+            </a:pPr>
+            <a:r>
+              <a:rPr sz="1600" b="0" i="0">
+                <a:solidFill>
+                  <a:srgbClr val="B8C4D0"/>
+                </a:solidFill>
+                <a:latin typeface="Calibri"/>
+              </a:rPr>
+              <a:t>Streamlit + Plotly: explorar, predecir y comparar</a:t>
+            </a:r>
+          </a:p>
+        </p:txBody>
+      </p:sp>
+      <p:sp>
+        <p:nvSpPr>
+          <p:cNvPr id="7" name="TextBox 6"/>
+          <p:cNvSpPr txBox="1"/>
+          <p:nvPr/>
+        </p:nvSpPr>
+        <p:spPr>
+          <a:xfrm>
+            <a:off x="11551615" y="6446520"/>
+            <a:ext cx="457200" cy="320040"/>
+          </a:xfrm>
+          <a:prstGeom prst="rect">
+            <a:avLst/>
+          </a:prstGeom>
+          <a:noFill/>
+        </p:spPr>
+        <p:txBody>
+          <a:bodyPr wrap="square" anchor="t" lIns="0" rIns="0" tIns="0" bIns="0">
+            <a:spAutoFit/>
+          </a:bodyPr>
+          <a:lstStyle/>
+          <a:p>
+            <a:pPr algn="r">
+              <a:lnSpc>
+                <a:spcPct val="100000"/>
+              </a:lnSpc>
+            </a:pPr>
+            <a:r>
+              <a:rPr sz="1100" b="0" i="0">
+                <a:solidFill>
+                  <a:srgbClr val="5B6B7C"/>
+                </a:solidFill>
+                <a:latin typeface="Calibri"/>
+              </a:rPr>
+              <a:t>24</a:t>
+            </a:r>
+          </a:p>
+        </p:txBody>
+      </p:sp>
+    </p:spTree>
+  </p:cSld>
+  <p:clrMapOvr>
+    <a:masterClrMapping/>
+  </p:clrMapOvr>
+</p:sld>
+</file>
+
+<file path=ppt/slides/slide25.xml><?xml version="1.0" encoding="utf-8"?>
+<p:sld xmlns:a="http://schemas.openxmlformats.org/drawingml/2006/main" xmlns:p="http://schemas.openxmlformats.org/presentationml/2006/main" xmlns:r="http://schemas.openxmlformats.org/officeDocument/2006/relationships">
+  <p:cSld>
+    <p:spTree>
+      <p:nvGrpSpPr>
+        <p:cNvPr id="1" name=""/>
+        <p:cNvGrpSpPr/>
+        <p:nvPr/>
+      </p:nvGrpSpPr>
+      <p:grpSpPr/>
+      <p:sp>
+        <p:nvSpPr>
+          <p:cNvPr id="2" name="Rectangle 1"/>
+          <p:cNvSpPr/>
+          <p:nvPr/>
+        </p:nvSpPr>
+        <p:spPr>
+          <a:xfrm>
+            <a:off x="0" y="0"/>
+            <a:ext cx="12191695" cy="6858000"/>
+          </a:xfrm>
+          <a:prstGeom prst="rect">
+            <a:avLst/>
+          </a:prstGeom>
+          <a:solidFill>
+            <a:srgbClr val="F6F8FA"/>
+          </a:solidFill>
+          <a:ln>
+            <a:noFill/>
+          </a:ln>
+          <a:effectLst/>
+        </p:spPr>
+        <p:style>
+          <a:lnRef idx="1">
+            <a:schemeClr val="accent1"/>
+          </a:lnRef>
+          <a:fillRef idx="3">
+            <a:schemeClr val="accent1"/>
+          </a:fillRef>
+          <a:effectRef idx="2">
+            <a:schemeClr val="accent1"/>
+          </a:effectRef>
+          <a:fontRef idx="minor">
+            <a:schemeClr val="lt1"/>
+          </a:fontRef>
+        </p:style>
+        <p:txBody>
+          <a:bodyPr rtlCol="0" anchor="ctr"/>
+          <a:lstStyle/>
+          <a:p>
+            <a:pPr algn="ctr"/>
+          </a:p>
+        </p:txBody>
+      </p:sp>
+      <p:sp>
+        <p:nvSpPr>
+          <p:cNvPr id="3" name="Rectangle 2"/>
+          <p:cNvSpPr/>
+          <p:nvPr/>
+        </p:nvSpPr>
+        <p:spPr>
+          <a:xfrm>
+            <a:off x="0" y="0"/>
+            <a:ext cx="12191695" cy="1234440"/>
+          </a:xfrm>
+          <a:prstGeom prst="rect">
+            <a:avLst/>
+          </a:prstGeom>
+          <a:solidFill>
+            <a:srgbClr val="0F1E33"/>
+          </a:solidFill>
+          <a:ln>
+            <a:noFill/>
+          </a:ln>
+          <a:effectLst/>
+        </p:spPr>
+        <p:style>
+          <a:lnRef idx="1">
+            <a:schemeClr val="accent1"/>
+          </a:lnRef>
+          <a:fillRef idx="3">
+            <a:schemeClr val="accent1"/>
+          </a:fillRef>
+          <a:effectRef idx="2">
+            <a:schemeClr val="accent1"/>
+          </a:effectRef>
+          <a:fontRef idx="minor">
+            <a:schemeClr val="lt1"/>
+          </a:fontRef>
+        </p:style>
+        <p:txBody>
+          <a:bodyPr rtlCol="0" anchor="ctr"/>
+          <a:lstStyle/>
+          <a:p>
+            <a:pPr algn="ctr"/>
+          </a:p>
+        </p:txBody>
+      </p:sp>
+      <p:sp>
+        <p:nvSpPr>
+          <p:cNvPr id="4" name="Rectangle 3"/>
+          <p:cNvSpPr/>
+          <p:nvPr/>
+        </p:nvSpPr>
+        <p:spPr>
+          <a:xfrm>
+            <a:off x="548640" y="384048"/>
+            <a:ext cx="320040" cy="54864"/>
+          </a:xfrm>
+          <a:prstGeom prst="rect">
+            <a:avLst/>
+          </a:prstGeom>
+          <a:solidFill>
+            <a:srgbClr val="2CA6A4"/>
+          </a:solidFill>
+          <a:ln>
+            <a:noFill/>
+          </a:ln>
+          <a:effectLst/>
+        </p:spPr>
+        <p:style>
+          <a:lnRef idx="1">
+            <a:schemeClr val="accent1"/>
+          </a:lnRef>
+          <a:fillRef idx="3">
+            <a:schemeClr val="accent1"/>
+          </a:fillRef>
+          <a:effectRef idx="2">
+            <a:schemeClr val="accent1"/>
+          </a:effectRef>
+          <a:fontRef idx="minor">
+            <a:schemeClr val="lt1"/>
+          </a:fontRef>
+        </p:style>
+        <p:txBody>
+          <a:bodyPr rtlCol="0" anchor="ctr"/>
+          <a:lstStyle/>
+          <a:p>
+            <a:pPr algn="ctr"/>
+          </a:p>
+        </p:txBody>
+      </p:sp>
+      <p:sp>
+        <p:nvSpPr>
+          <p:cNvPr id="5" name="TextBox 4"/>
+          <p:cNvSpPr txBox="1"/>
+          <p:nvPr/>
+        </p:nvSpPr>
+        <p:spPr>
+          <a:xfrm>
+            <a:off x="960120" y="274320"/>
+            <a:ext cx="8229600" cy="274320"/>
+          </a:xfrm>
+          <a:prstGeom prst="rect">
+            <a:avLst/>
+          </a:prstGeom>
+          <a:noFill/>
+        </p:spPr>
+        <p:txBody>
+          <a:bodyPr wrap="square" anchor="t" lIns="0" rIns="0" tIns="0" bIns="0">
+            <a:spAutoFit/>
+          </a:bodyPr>
+          <a:lstStyle/>
+          <a:p>
+            <a:pPr algn="l">
+              <a:lnSpc>
+                <a:spcPct val="100000"/>
+              </a:lnSpc>
+            </a:pPr>
+            <a:r>
+              <a:rPr sz="1200" b="1" i="0">
+                <a:solidFill>
+                  <a:srgbClr val="2CA6A4"/>
+                </a:solidFill>
+                <a:latin typeface="Calibri"/>
+              </a:rPr>
+              <a:t>LA APP</a:t>
+            </a:r>
+          </a:p>
+        </p:txBody>
+      </p:sp>
+      <p:sp>
+        <p:nvSpPr>
+          <p:cNvPr id="6" name="TextBox 5"/>
+          <p:cNvSpPr txBox="1"/>
+          <p:nvPr/>
+        </p:nvSpPr>
+        <p:spPr>
+          <a:xfrm>
+            <a:off x="548640" y="548640"/>
+            <a:ext cx="10515600" cy="640080"/>
+          </a:xfrm>
+          <a:prstGeom prst="rect">
+            <a:avLst/>
+          </a:prstGeom>
+          <a:noFill/>
+        </p:spPr>
+        <p:txBody>
+          <a:bodyPr wrap="square" anchor="t" lIns="0" rIns="0" tIns="0" bIns="0">
+            <a:spAutoFit/>
+          </a:bodyPr>
+          <a:lstStyle/>
+          <a:p>
+            <a:pPr algn="l">
+              <a:lnSpc>
+                <a:spcPct val="100000"/>
+              </a:lnSpc>
+            </a:pPr>
+            <a:r>
+              <a:rPr sz="2500" b="1" i="0">
+                <a:solidFill>
+                  <a:srgbClr val="FFFFFF"/>
+                </a:solidFill>
+                <a:latin typeface="Calibri"/>
+              </a:rPr>
+              <a:t>Predecir: frase real vs. predicha</a:t>
+            </a:r>
+          </a:p>
+        </p:txBody>
+      </p:sp>
+      <p:pic>
+        <p:nvPicPr>
+          <p:cNvPr id="7" name="Picture 6" descr="presentacion_app_predecir.png"/>
+          <p:cNvPicPr>
+            <a:picLocks noChangeAspect="1"/>
+          </p:cNvPicPr>
+          <p:nvPr/>
+        </p:nvPicPr>
+        <p:blipFill>
+          <a:blip r:embed="rId2"/>
+          <a:stretch>
+            <a:fillRect/>
+          </a:stretch>
+        </p:blipFill>
+        <p:spPr>
+          <a:xfrm>
+            <a:off x="457200" y="2173357"/>
+            <a:ext cx="7680960" cy="3700006"/>
+          </a:xfrm>
+          <a:prstGeom prst="rect">
+            <a:avLst/>
+          </a:prstGeom>
+        </p:spPr>
+      </p:pic>
+      <p:sp>
+        <p:nvSpPr>
+          <p:cNvPr id="8" name="TextBox 7"/>
+          <p:cNvSpPr txBox="1"/>
+          <p:nvPr/>
+        </p:nvSpPr>
+        <p:spPr>
+          <a:xfrm>
+            <a:off x="8412480" y="1828800"/>
+            <a:ext cx="3383280" cy="4389120"/>
+          </a:xfrm>
+          <a:prstGeom prst="rect">
+            <a:avLst/>
+          </a:prstGeom>
+          <a:noFill/>
+        </p:spPr>
+        <p:txBody>
+          <a:bodyPr wrap="square" lIns="0" rIns="0">
+            <a:spAutoFit/>
+          </a:bodyPr>
+          <a:lstStyle/>
+          <a:p>
+            <a:pPr>
+              <a:lnSpc>
+                <a:spcPct val="108000"/>
+              </a:lnSpc>
+              <a:spcAft>
+                <a:spcPts val="1400"/>
+              </a:spcAft>
+            </a:pPr>
+            <a:r>
+              <a:rPr sz="1500">
+                <a:solidFill>
+                  <a:srgbClr val="1B222D"/>
+                </a:solidFill>
+                <a:latin typeface="Calibri"/>
+              </a:rPr>
+              <a:t>›  Se elige una secuencia de prueba o se sube un parquet de landmarks (se preprocesa igual que en el entrenamiento).</a:t>
+            </a:r>
+          </a:p>
+          <a:p>
+            <a:pPr>
+              <a:lnSpc>
+                <a:spcPct val="108000"/>
+              </a:lnSpc>
+              <a:spcAft>
+                <a:spcPts val="1400"/>
+              </a:spcAft>
+            </a:pPr>
+            <a:r>
+              <a:rPr sz="1500">
+                <a:solidFill>
+                  <a:srgbClr val="1B222D"/>
+                </a:solidFill>
+                <a:latin typeface="Calibri"/>
+              </a:rPr>
+              <a:t>›  Uno o todos los modelos a la vez.</a:t>
+            </a:r>
+          </a:p>
+          <a:p>
+            <a:pPr>
+              <a:lnSpc>
+                <a:spcPct val="108000"/>
+              </a:lnSpc>
+              <a:spcAft>
+                <a:spcPts val="1400"/>
+              </a:spcAft>
+            </a:pPr>
+            <a:r>
+              <a:rPr sz="1500">
+                <a:solidFill>
+                  <a:srgbClr val="1B222D"/>
+                </a:solidFill>
+                <a:latin typeface="Calibri"/>
+              </a:rPr>
+              <a:t>›  Cada carácter se colorea según la alineación: correcto, sustituido, insertado u omitido.</a:t>
+            </a:r>
+          </a:p>
+        </p:txBody>
+      </p:sp>
+      <p:sp>
+        <p:nvSpPr>
+          <p:cNvPr id="9" name="TextBox 8"/>
+          <p:cNvSpPr txBox="1"/>
+          <p:nvPr/>
+        </p:nvSpPr>
+        <p:spPr>
+          <a:xfrm>
+            <a:off x="11551615" y="6446520"/>
+            <a:ext cx="457200" cy="320040"/>
+          </a:xfrm>
+          <a:prstGeom prst="rect">
+            <a:avLst/>
+          </a:prstGeom>
+          <a:noFill/>
+        </p:spPr>
+        <p:txBody>
+          <a:bodyPr wrap="square" anchor="t" lIns="0" rIns="0" tIns="0" bIns="0">
+            <a:spAutoFit/>
+          </a:bodyPr>
+          <a:lstStyle/>
+          <a:p>
+            <a:pPr algn="r">
+              <a:lnSpc>
+                <a:spcPct val="100000"/>
+              </a:lnSpc>
+            </a:pPr>
+            <a:r>
+              <a:rPr sz="1100" b="0" i="0">
+                <a:solidFill>
+                  <a:srgbClr val="5B6B7C"/>
+                </a:solidFill>
+                <a:latin typeface="Calibri"/>
+              </a:rPr>
+              <a:t>25</a:t>
+            </a:r>
+          </a:p>
+        </p:txBody>
+      </p:sp>
+    </p:spTree>
+  </p:cSld>
+  <p:clrMapOvr>
+    <a:masterClrMapping/>
+  </p:clrMapOvr>
+</p:sld>
+</file>
+
+<file path=ppt/slides/slide26.xml><?xml version="1.0" encoding="utf-8"?>
+<p:sld xmlns:a="http://schemas.openxmlformats.org/drawingml/2006/main" xmlns:p="http://schemas.openxmlformats.org/presentationml/2006/main" xmlns:r="http://schemas.openxmlformats.org/officeDocument/2006/relationships">
+  <p:cSld>
+    <p:spTree>
+      <p:nvGrpSpPr>
+        <p:cNvPr id="1" name=""/>
+        <p:cNvGrpSpPr/>
+        <p:nvPr/>
+      </p:nvGrpSpPr>
+      <p:grpSpPr/>
+      <p:sp>
+        <p:nvSpPr>
+          <p:cNvPr id="2" name="Rectangle 1"/>
+          <p:cNvSpPr/>
+          <p:nvPr/>
+        </p:nvSpPr>
+        <p:spPr>
+          <a:xfrm>
+            <a:off x="0" y="0"/>
+            <a:ext cx="12191695" cy="6858000"/>
+          </a:xfrm>
+          <a:prstGeom prst="rect">
+            <a:avLst/>
+          </a:prstGeom>
+          <a:solidFill>
+            <a:srgbClr val="F6F8FA"/>
+          </a:solidFill>
+          <a:ln>
+            <a:noFill/>
+          </a:ln>
+          <a:effectLst/>
+        </p:spPr>
+        <p:style>
+          <a:lnRef idx="1">
+            <a:schemeClr val="accent1"/>
+          </a:lnRef>
+          <a:fillRef idx="3">
+            <a:schemeClr val="accent1"/>
+          </a:fillRef>
+          <a:effectRef idx="2">
+            <a:schemeClr val="accent1"/>
+          </a:effectRef>
+          <a:fontRef idx="minor">
+            <a:schemeClr val="lt1"/>
+          </a:fontRef>
+        </p:style>
+        <p:txBody>
+          <a:bodyPr rtlCol="0" anchor="ctr"/>
+          <a:lstStyle/>
+          <a:p>
+            <a:pPr algn="ctr"/>
+          </a:p>
+        </p:txBody>
+      </p:sp>
+      <p:sp>
+        <p:nvSpPr>
+          <p:cNvPr id="3" name="Rectangle 2"/>
+          <p:cNvSpPr/>
+          <p:nvPr/>
+        </p:nvSpPr>
+        <p:spPr>
+          <a:xfrm>
+            <a:off x="0" y="0"/>
+            <a:ext cx="12191695" cy="1234440"/>
+          </a:xfrm>
+          <a:prstGeom prst="rect">
+            <a:avLst/>
+          </a:prstGeom>
+          <a:solidFill>
+            <a:srgbClr val="0F1E33"/>
+          </a:solidFill>
+          <a:ln>
+            <a:noFill/>
+          </a:ln>
+          <a:effectLst/>
+        </p:spPr>
+        <p:style>
+          <a:lnRef idx="1">
+            <a:schemeClr val="accent1"/>
+          </a:lnRef>
+          <a:fillRef idx="3">
+            <a:schemeClr val="accent1"/>
+          </a:fillRef>
+          <a:effectRef idx="2">
+            <a:schemeClr val="accent1"/>
+          </a:effectRef>
+          <a:fontRef idx="minor">
+            <a:schemeClr val="lt1"/>
+          </a:fontRef>
+        </p:style>
+        <p:txBody>
+          <a:bodyPr rtlCol="0" anchor="ctr"/>
+          <a:lstStyle/>
+          <a:p>
+            <a:pPr algn="ctr"/>
+          </a:p>
+        </p:txBody>
+      </p:sp>
+      <p:sp>
+        <p:nvSpPr>
+          <p:cNvPr id="4" name="Rectangle 3"/>
+          <p:cNvSpPr/>
+          <p:nvPr/>
+        </p:nvSpPr>
+        <p:spPr>
+          <a:xfrm>
+            <a:off x="548640" y="384048"/>
+            <a:ext cx="320040" cy="54864"/>
+          </a:xfrm>
+          <a:prstGeom prst="rect">
+            <a:avLst/>
+          </a:prstGeom>
+          <a:solidFill>
+            <a:srgbClr val="2CA6A4"/>
+          </a:solidFill>
+          <a:ln>
+            <a:noFill/>
+          </a:ln>
+          <a:effectLst/>
+        </p:spPr>
+        <p:style>
+          <a:lnRef idx="1">
+            <a:schemeClr val="accent1"/>
+          </a:lnRef>
+          <a:fillRef idx="3">
+            <a:schemeClr val="accent1"/>
+          </a:fillRef>
+          <a:effectRef idx="2">
+            <a:schemeClr val="accent1"/>
+          </a:effectRef>
+          <a:fontRef idx="minor">
+            <a:schemeClr val="lt1"/>
+          </a:fontRef>
+        </p:style>
+        <p:txBody>
+          <a:bodyPr rtlCol="0" anchor="ctr"/>
+          <a:lstStyle/>
+          <a:p>
+            <a:pPr algn="ctr"/>
+          </a:p>
+        </p:txBody>
+      </p:sp>
+      <p:sp>
+        <p:nvSpPr>
+          <p:cNvPr id="5" name="TextBox 4"/>
+          <p:cNvSpPr txBox="1"/>
+          <p:nvPr/>
+        </p:nvSpPr>
+        <p:spPr>
+          <a:xfrm>
+            <a:off x="960120" y="274320"/>
+            <a:ext cx="8229600" cy="274320"/>
+          </a:xfrm>
+          <a:prstGeom prst="rect">
+            <a:avLst/>
+          </a:prstGeom>
+          <a:noFill/>
+        </p:spPr>
+        <p:txBody>
+          <a:bodyPr wrap="square" anchor="t" lIns="0" rIns="0" tIns="0" bIns="0">
+            <a:spAutoFit/>
+          </a:bodyPr>
+          <a:lstStyle/>
+          <a:p>
+            <a:pPr algn="l">
+              <a:lnSpc>
+                <a:spcPct val="100000"/>
+              </a:lnSpc>
+            </a:pPr>
+            <a:r>
+              <a:rPr sz="1200" b="1" i="0">
+                <a:solidFill>
+                  <a:srgbClr val="2CA6A4"/>
+                </a:solidFill>
+                <a:latin typeface="Calibri"/>
+              </a:rPr>
+              <a:t>LA APP</a:t>
+            </a:r>
+          </a:p>
+        </p:txBody>
+      </p:sp>
+      <p:sp>
+        <p:nvSpPr>
+          <p:cNvPr id="6" name="TextBox 5"/>
+          <p:cNvSpPr txBox="1"/>
+          <p:nvPr/>
+        </p:nvSpPr>
+        <p:spPr>
+          <a:xfrm>
+            <a:off x="548640" y="548640"/>
+            <a:ext cx="10515600" cy="640080"/>
+          </a:xfrm>
+          <a:prstGeom prst="rect">
+            <a:avLst/>
+          </a:prstGeom>
+          <a:noFill/>
+        </p:spPr>
+        <p:txBody>
+          <a:bodyPr wrap="square" anchor="t" lIns="0" rIns="0" tIns="0" bIns="0">
+            <a:spAutoFit/>
+          </a:bodyPr>
+          <a:lstStyle/>
+          <a:p>
+            <a:pPr algn="l">
+              <a:lnSpc>
+                <a:spcPct val="100000"/>
+              </a:lnSpc>
+            </a:pPr>
+            <a:r>
+              <a:rPr sz="2500" b="1" i="0">
+                <a:solidFill>
+                  <a:srgbClr val="FFFFFF"/>
+                </a:solidFill>
+                <a:latin typeface="Calibri"/>
+              </a:rPr>
+              <a:t>Rendimiento: gráficas interactivas</a:t>
+            </a:r>
+          </a:p>
+        </p:txBody>
+      </p:sp>
+      <p:pic>
+        <p:nvPicPr>
+          <p:cNvPr id="7" name="Picture 6" descr="presentacion_app_rendimiento.png"/>
+          <p:cNvPicPr>
+            <a:picLocks noChangeAspect="1"/>
+          </p:cNvPicPr>
+          <p:nvPr/>
+        </p:nvPicPr>
+        <p:blipFill>
+          <a:blip r:embed="rId2"/>
+          <a:stretch>
+            <a:fillRect/>
+          </a:stretch>
+        </p:blipFill>
+        <p:spPr>
+          <a:xfrm>
+            <a:off x="1432400" y="1417320"/>
+            <a:ext cx="5730559" cy="5212080"/>
+          </a:xfrm>
+          <a:prstGeom prst="rect">
+            <a:avLst/>
+          </a:prstGeom>
+        </p:spPr>
+      </p:pic>
+      <p:sp>
+        <p:nvSpPr>
+          <p:cNvPr id="8" name="TextBox 7"/>
+          <p:cNvSpPr txBox="1"/>
+          <p:nvPr/>
+        </p:nvSpPr>
+        <p:spPr>
+          <a:xfrm>
+            <a:off x="8412480" y="1828800"/>
+            <a:ext cx="3383280" cy="4389120"/>
+          </a:xfrm>
+          <a:prstGeom prst="rect">
+            <a:avLst/>
+          </a:prstGeom>
+          <a:noFill/>
+        </p:spPr>
+        <p:txBody>
+          <a:bodyPr wrap="square" lIns="0" rIns="0">
+            <a:spAutoFit/>
+          </a:bodyPr>
+          <a:lstStyle/>
+          <a:p>
+            <a:pPr>
+              <a:lnSpc>
+                <a:spcPct val="108000"/>
+              </a:lnSpc>
+              <a:spcAft>
+                <a:spcPts val="1400"/>
+              </a:spcAft>
+            </a:pPr>
+            <a:r>
+              <a:rPr sz="1500">
+                <a:solidFill>
+                  <a:srgbClr val="1B222D"/>
+                </a:solidFill>
+                <a:latin typeface="Calibri"/>
+              </a:rPr>
+              <a:t>›  CER por modelo, curvas de entrenamiento, costo vs. error y error por carácter.</a:t>
+            </a:r>
+          </a:p>
+          <a:p>
+            <a:pPr>
+              <a:lnSpc>
+                <a:spcPct val="108000"/>
+              </a:lnSpc>
+              <a:spcAft>
+                <a:spcPts val="1400"/>
+              </a:spcAft>
+            </a:pPr>
+            <a:r>
+              <a:rPr sz="1500">
+                <a:solidFill>
+                  <a:srgbClr val="1B222D"/>
+                </a:solidFill>
+                <a:latin typeface="Calibri"/>
+              </a:rPr>
+              <a:t>›  Cada gráfica se puede ocultar; los modelos se filtran en la barra lateral.</a:t>
+            </a:r>
+          </a:p>
+          <a:p>
+            <a:pPr>
+              <a:lnSpc>
+                <a:spcPct val="108000"/>
+              </a:lnSpc>
+              <a:spcAft>
+                <a:spcPts val="1400"/>
+              </a:spcAft>
+            </a:pPr>
+            <a:r>
+              <a:rPr sz="1500">
+                <a:solidFill>
+                  <a:srgbClr val="1B222D"/>
+                </a:solidFill>
+                <a:latin typeface="Calibri"/>
+              </a:rPr>
+              <a:t>›  Un color fijo por modelo en toda la app y en esta presentación.</a:t>
+            </a:r>
+          </a:p>
+        </p:txBody>
+      </p:sp>
+      <p:sp>
+        <p:nvSpPr>
+          <p:cNvPr id="9" name="TextBox 8"/>
+          <p:cNvSpPr txBox="1"/>
+          <p:nvPr/>
+        </p:nvSpPr>
+        <p:spPr>
+          <a:xfrm>
+            <a:off x="11551615" y="6446520"/>
+            <a:ext cx="457200" cy="320040"/>
+          </a:xfrm>
+          <a:prstGeom prst="rect">
+            <a:avLst/>
+          </a:prstGeom>
+          <a:noFill/>
+        </p:spPr>
+        <p:txBody>
+          <a:bodyPr wrap="square" anchor="t" lIns="0" rIns="0" tIns="0" bIns="0">
+            <a:spAutoFit/>
+          </a:bodyPr>
+          <a:lstStyle/>
+          <a:p>
+            <a:pPr algn="r">
+              <a:lnSpc>
+                <a:spcPct val="100000"/>
+              </a:lnSpc>
+            </a:pPr>
+            <a:r>
+              <a:rPr sz="1100" b="0" i="0">
+                <a:solidFill>
+                  <a:srgbClr val="5B6B7C"/>
+                </a:solidFill>
+                <a:latin typeface="Calibri"/>
+              </a:rPr>
+              <a:t>26</a:t>
+            </a:r>
+          </a:p>
+        </p:txBody>
+      </p:sp>
+    </p:spTree>
+  </p:cSld>
+  <p:clrMapOvr>
+    <a:masterClrMapping/>
+  </p:clrMapOvr>
+</p:sld>
+</file>
+
+<file path=ppt/slides/slide27.xml><?xml version="1.0" encoding="utf-8"?>
+<p:sld xmlns:a="http://schemas.openxmlformats.org/drawingml/2006/main" xmlns:p="http://schemas.openxmlformats.org/presentationml/2006/main" xmlns:r="http://schemas.openxmlformats.org/officeDocument/2006/relationships">
+  <p:cSld>
+    <p:spTree>
+      <p:nvGrpSpPr>
+        <p:cNvPr id="1" name=""/>
+        <p:cNvGrpSpPr/>
+        <p:nvPr/>
+      </p:nvGrpSpPr>
+      <p:grpSpPr/>
+      <p:sp>
+        <p:nvSpPr>
+          <p:cNvPr id="2" name="Rectangle 1"/>
+          <p:cNvSpPr/>
+          <p:nvPr/>
+        </p:nvSpPr>
+        <p:spPr>
+          <a:xfrm>
+            <a:off x="0" y="0"/>
+            <a:ext cx="12191695" cy="6858000"/>
+          </a:xfrm>
+          <a:prstGeom prst="rect">
+            <a:avLst/>
+          </a:prstGeom>
+          <a:solidFill>
+            <a:srgbClr val="F6F8FA"/>
+          </a:solidFill>
+          <a:ln>
+            <a:noFill/>
+          </a:ln>
+          <a:effectLst/>
+        </p:spPr>
+        <p:style>
+          <a:lnRef idx="1">
+            <a:schemeClr val="accent1"/>
+          </a:lnRef>
+          <a:fillRef idx="3">
+            <a:schemeClr val="accent1"/>
+          </a:fillRef>
+          <a:effectRef idx="2">
+            <a:schemeClr val="accent1"/>
+          </a:effectRef>
+          <a:fontRef idx="minor">
+            <a:schemeClr val="lt1"/>
+          </a:fontRef>
+        </p:style>
+        <p:txBody>
+          <a:bodyPr rtlCol="0" anchor="ctr"/>
+          <a:lstStyle/>
+          <a:p>
+            <a:pPr algn="ctr"/>
+          </a:p>
+        </p:txBody>
+      </p:sp>
+      <p:sp>
+        <p:nvSpPr>
+          <p:cNvPr id="3" name="Rectangle 2"/>
+          <p:cNvSpPr/>
+          <p:nvPr/>
+        </p:nvSpPr>
+        <p:spPr>
+          <a:xfrm>
+            <a:off x="0" y="0"/>
+            <a:ext cx="12191695" cy="1234440"/>
+          </a:xfrm>
+          <a:prstGeom prst="rect">
+            <a:avLst/>
+          </a:prstGeom>
+          <a:solidFill>
+            <a:srgbClr val="0F1E33"/>
+          </a:solidFill>
+          <a:ln>
+            <a:noFill/>
+          </a:ln>
+          <a:effectLst/>
+        </p:spPr>
+        <p:style>
+          <a:lnRef idx="1">
+            <a:schemeClr val="accent1"/>
+          </a:lnRef>
+          <a:fillRef idx="3">
+            <a:schemeClr val="accent1"/>
+          </a:fillRef>
+          <a:effectRef idx="2">
+            <a:schemeClr val="accent1"/>
+          </a:effectRef>
+          <a:fontRef idx="minor">
+            <a:schemeClr val="lt1"/>
+          </a:fontRef>
+        </p:style>
+        <p:txBody>
+          <a:bodyPr rtlCol="0" anchor="ctr"/>
+          <a:lstStyle/>
+          <a:p>
+            <a:pPr algn="ctr"/>
+          </a:p>
+        </p:txBody>
+      </p:sp>
+      <p:sp>
+        <p:nvSpPr>
+          <p:cNvPr id="4" name="Rectangle 3"/>
+          <p:cNvSpPr/>
+          <p:nvPr/>
+        </p:nvSpPr>
+        <p:spPr>
+          <a:xfrm>
+            <a:off x="548640" y="384048"/>
+            <a:ext cx="320040" cy="54864"/>
+          </a:xfrm>
+          <a:prstGeom prst="rect">
+            <a:avLst/>
+          </a:prstGeom>
+          <a:solidFill>
+            <a:srgbClr val="2CA6A4"/>
+          </a:solidFill>
+          <a:ln>
+            <a:noFill/>
+          </a:ln>
+          <a:effectLst/>
+        </p:spPr>
+        <p:style>
+          <a:lnRef idx="1">
+            <a:schemeClr val="accent1"/>
+          </a:lnRef>
+          <a:fillRef idx="3">
+            <a:schemeClr val="accent1"/>
+          </a:fillRef>
+          <a:effectRef idx="2">
+            <a:schemeClr val="accent1"/>
+          </a:effectRef>
+          <a:fontRef idx="minor">
+            <a:schemeClr val="lt1"/>
+          </a:fontRef>
+        </p:style>
+        <p:txBody>
+          <a:bodyPr rtlCol="0" anchor="ctr"/>
+          <a:lstStyle/>
+          <a:p>
+            <a:pPr algn="ctr"/>
+          </a:p>
+        </p:txBody>
+      </p:sp>
+      <p:sp>
+        <p:nvSpPr>
+          <p:cNvPr id="5" name="TextBox 4"/>
+          <p:cNvSpPr txBox="1"/>
+          <p:nvPr/>
+        </p:nvSpPr>
+        <p:spPr>
+          <a:xfrm>
+            <a:off x="960120" y="274320"/>
+            <a:ext cx="8229600" cy="274320"/>
+          </a:xfrm>
+          <a:prstGeom prst="rect">
+            <a:avLst/>
+          </a:prstGeom>
+          <a:noFill/>
+        </p:spPr>
+        <p:txBody>
+          <a:bodyPr wrap="square" anchor="t" lIns="0" rIns="0" tIns="0" bIns="0">
+            <a:spAutoFit/>
+          </a:bodyPr>
+          <a:lstStyle/>
+          <a:p>
+            <a:pPr algn="l">
+              <a:lnSpc>
+                <a:spcPct val="100000"/>
+              </a:lnSpc>
+            </a:pPr>
+            <a:r>
+              <a:rPr sz="1200" b="1" i="0">
+                <a:solidFill>
+                  <a:srgbClr val="2CA6A4"/>
+                </a:solidFill>
+                <a:latin typeface="Calibri"/>
+              </a:rPr>
+              <a:t>CONCLUSIONES</a:t>
+            </a:r>
+          </a:p>
+        </p:txBody>
+      </p:sp>
+      <p:sp>
+        <p:nvSpPr>
+          <p:cNvPr id="6" name="TextBox 5"/>
+          <p:cNvSpPr txBox="1"/>
+          <p:nvPr/>
+        </p:nvSpPr>
+        <p:spPr>
+          <a:xfrm>
+            <a:off x="548640" y="548640"/>
+            <a:ext cx="10515600" cy="640080"/>
+          </a:xfrm>
+          <a:prstGeom prst="rect">
+            <a:avLst/>
+          </a:prstGeom>
+          <a:noFill/>
+        </p:spPr>
+        <p:txBody>
+          <a:bodyPr wrap="square" anchor="t" lIns="0" rIns="0" tIns="0" bIns="0">
+            <a:spAutoFit/>
+          </a:bodyPr>
+          <a:lstStyle/>
+          <a:p>
+            <a:pPr algn="l">
+              <a:lnSpc>
+                <a:spcPct val="100000"/>
+              </a:lnSpc>
+            </a:pPr>
+            <a:r>
+              <a:rPr sz="2500" b="1" i="0">
+                <a:solidFill>
+                  <a:srgbClr val="FFFFFF"/>
+                </a:solidFill>
+                <a:latin typeface="Calibri"/>
+              </a:rPr>
+              <a:t>Qué aprendimos</a:t>
+            </a:r>
+          </a:p>
+        </p:txBody>
+      </p:sp>
+      <p:sp>
+        <p:nvSpPr>
+          <p:cNvPr id="7" name="TextBox 6"/>
+          <p:cNvSpPr txBox="1"/>
+          <p:nvPr/>
+        </p:nvSpPr>
+        <p:spPr>
+          <a:xfrm>
+            <a:off x="640080" y="1645920"/>
+            <a:ext cx="10881360" cy="4754880"/>
+          </a:xfrm>
+          <a:prstGeom prst="rect">
+            <a:avLst/>
+          </a:prstGeom>
+          <a:noFill/>
+        </p:spPr>
+        <p:txBody>
+          <a:bodyPr wrap="square" lIns="0" rIns="0">
+            <a:spAutoFit/>
+          </a:bodyPr>
+          <a:lstStyle/>
+          <a:p>
+            <a:pPr>
+              <a:lnSpc>
+                <a:spcPct val="108000"/>
+              </a:lnSpc>
+              <a:spcAft>
+                <a:spcPts val="1600"/>
+              </a:spcAft>
+            </a:pPr>
+            <a:r>
+              <a:rPr sz="1700">
+                <a:solidFill>
+                  <a:srgbClr val="1B222D"/>
+                </a:solidFill>
+                <a:latin typeface="Calibri"/>
+              </a:rPr>
+              <a:t>›  Con solo 1,315 secuencias de entrenamiento, los modelos transcriben alrededor del 50 % de los caracteres de personas que no vieron al entrenar.</a:t>
+            </a:r>
+          </a:p>
+          <a:p>
+            <a:pPr>
+              <a:lnSpc>
+                <a:spcPct val="108000"/>
+              </a:lnSpc>
+              <a:spcAft>
+                <a:spcPts val="1600"/>
+              </a:spcAft>
+            </a:pPr>
+            <a:r>
+              <a:rPr sz="1700">
+                <a:solidFill>
+                  <a:srgbClr val="1B222D"/>
+                </a:solidFill>
+                <a:latin typeface="Calibri"/>
+              </a:rPr>
+              <a:t>›  El CNN-BiGRU (CER 0.490) y el Transformer (CER 0.499) empatan en error; el Transformer lo logra con un tercio de los parámetros y del tiempo de predicción.</a:t>
+            </a:r>
+          </a:p>
+          <a:p>
+            <a:pPr>
+              <a:lnSpc>
+                <a:spcPct val="108000"/>
+              </a:lnSpc>
+              <a:spcAft>
+                <a:spcPts val="1600"/>
+              </a:spcAft>
+            </a:pPr>
+            <a:r>
+              <a:rPr sz="1700">
+                <a:solidFill>
+                  <a:srgbClr val="1B222D"/>
+                </a:solidFill>
+                <a:latin typeface="Calibri"/>
+              </a:rPr>
+              <a:t>›  Los hallazgos del EDA explican el error: la cobertura de mano es el factor más fuerte (Spearman ≈ −0.7), y los caracteres raros (q, x, z) se fallan casi siempre.</a:t>
+            </a:r>
+          </a:p>
+          <a:p>
+            <a:pPr>
+              <a:lnSpc>
+                <a:spcPct val="108000"/>
+              </a:lnSpc>
+              <a:spcAft>
+                <a:spcPts val="1600"/>
+              </a:spcAft>
+            </a:pPr>
+            <a:r>
+              <a:rPr sz="1700">
+                <a:solidFill>
+                  <a:srgbClr val="1B222D"/>
+                </a:solidFill>
+                <a:latin typeface="Calibri"/>
+              </a:rPr>
+              <a:t>›  El error dominante es omitir letras (68-76 %), sobre todo espacios y letras frecuentes.</a:t>
+            </a:r>
+          </a:p>
+          <a:p>
+            <a:pPr>
+              <a:lnSpc>
+                <a:spcPct val="108000"/>
+              </a:lnSpc>
+              <a:spcAft>
+                <a:spcPts val="1600"/>
+              </a:spcAft>
+            </a:pPr>
+            <a:r>
+              <a:rPr sz="1700">
+                <a:solidFill>
+                  <a:srgbClr val="1B222D"/>
+                </a:solidFill>
+                <a:latin typeface="Calibri"/>
+              </a:rPr>
+              <a:t>›  El límite lo pone la cantidad de datos, no la arquitectura: la mejora más directa es la aumentación y usar más archivos de la competencia.</a:t>
+            </a:r>
+          </a:p>
+        </p:txBody>
+      </p:sp>
+      <p:sp>
+        <p:nvSpPr>
+          <p:cNvPr id="8" name="TextBox 7"/>
+          <p:cNvSpPr txBox="1"/>
+          <p:nvPr/>
+        </p:nvSpPr>
+        <p:spPr>
+          <a:xfrm>
+            <a:off x="11551615" y="6446520"/>
+            <a:ext cx="457200" cy="320040"/>
+          </a:xfrm>
+          <a:prstGeom prst="rect">
+            <a:avLst/>
+          </a:prstGeom>
+          <a:noFill/>
+        </p:spPr>
+        <p:txBody>
+          <a:bodyPr wrap="square" anchor="t" lIns="0" rIns="0" tIns="0" bIns="0">
+            <a:spAutoFit/>
+          </a:bodyPr>
+          <a:lstStyle/>
+          <a:p>
+            <a:pPr algn="r">
+              <a:lnSpc>
+                <a:spcPct val="100000"/>
+              </a:lnSpc>
+            </a:pPr>
+            <a:r>
+              <a:rPr sz="1100" b="0" i="0">
+                <a:solidFill>
+                  <a:srgbClr val="5B6B7C"/>
+                </a:solidFill>
+                <a:latin typeface="Calibri"/>
+              </a:rPr>
+              <a:t>27</a:t>
+            </a:r>
+          </a:p>
+        </p:txBody>
+      </p:sp>
+    </p:spTree>
+  </p:cSld>
+  <p:clrMapOvr>
+    <a:masterClrMapping/>
+  </p:clrMapOvr>
+</p:sld>
+</file>
+
+<file path=ppt/slides/slide28.xml><?xml version="1.0" encoding="utf-8"?>
+<p:sld xmlns:a="http://schemas.openxmlformats.org/drawingml/2006/main" xmlns:p="http://schemas.openxmlformats.org/presentationml/2006/main" xmlns:r="http://schemas.openxmlformats.org/officeDocument/2006/relationships">
+  <p:cSld>
+    <p:spTree>
+      <p:nvGrpSpPr>
+        <p:cNvPr id="1" name=""/>
+        <p:cNvGrpSpPr/>
+        <p:nvPr/>
+      </p:nvGrpSpPr>
+      <p:grpSpPr/>
+      <p:sp>
+        <p:nvSpPr>
+          <p:cNvPr id="2" name="Rectangle 1"/>
+          <p:cNvSpPr/>
+          <p:nvPr/>
+        </p:nvSpPr>
+        <p:spPr>
+          <a:xfrm>
+            <a:off x="0" y="0"/>
+            <a:ext cx="12191695" cy="6858000"/>
+          </a:xfrm>
+          <a:prstGeom prst="rect">
+            <a:avLst/>
+          </a:prstGeom>
+          <a:solidFill>
+            <a:srgbClr val="0F1E33"/>
+          </a:solidFill>
+          <a:ln>
+            <a:noFill/>
+          </a:ln>
+          <a:effectLst/>
+        </p:spPr>
+        <p:style>
+          <a:lnRef idx="1">
+            <a:schemeClr val="accent1"/>
+          </a:lnRef>
+          <a:fillRef idx="3">
+            <a:schemeClr val="accent1"/>
+          </a:fillRef>
+          <a:effectRef idx="2">
+            <a:schemeClr val="accent1"/>
+          </a:effectRef>
+          <a:fontRef idx="minor">
+            <a:schemeClr val="lt1"/>
+          </a:fontRef>
+        </p:style>
+        <p:txBody>
+          <a:bodyPr rtlCol="0" anchor="ctr"/>
+          <a:lstStyle/>
+          <a:p>
+            <a:pPr algn="ctr"/>
+          </a:p>
+        </p:txBody>
+      </p:sp>
+      <p:sp>
+        <p:nvSpPr>
+          <p:cNvPr id="3" name="Rectangle 2"/>
+          <p:cNvSpPr/>
+          <p:nvPr/>
+        </p:nvSpPr>
+        <p:spPr>
+          <a:xfrm>
+            <a:off x="0" y="0"/>
+            <a:ext cx="256032" cy="6858000"/>
+          </a:xfrm>
+          <a:prstGeom prst="rect">
+            <a:avLst/>
+          </a:prstGeom>
+          <a:solidFill>
+            <a:srgbClr val="2CA6A4"/>
+          </a:solidFill>
+          <a:ln>
+            <a:noFill/>
+          </a:ln>
+          <a:effectLst/>
+        </p:spPr>
+        <p:style>
+          <a:lnRef idx="1">
+            <a:schemeClr val="accent1"/>
+          </a:lnRef>
+          <a:fillRef idx="3">
+            <a:schemeClr val="accent1"/>
+          </a:fillRef>
+          <a:effectRef idx="2">
+            <a:schemeClr val="accent1"/>
+          </a:effectRef>
+          <a:fontRef idx="minor">
+            <a:schemeClr val="lt1"/>
+          </a:fontRef>
+        </p:style>
+        <p:txBody>
+          <a:bodyPr rtlCol="0" anchor="ctr"/>
+          <a:lstStyle/>
+          <a:p>
+            <a:pPr algn="ctr"/>
+          </a:p>
+        </p:txBody>
+      </p:sp>
+      <p:sp>
+        <p:nvSpPr>
+          <p:cNvPr id="4" name="TextBox 3"/>
+          <p:cNvSpPr txBox="1"/>
+          <p:nvPr/>
+        </p:nvSpPr>
+        <p:spPr>
+          <a:xfrm>
+            <a:off x="822960" y="2468880"/>
+            <a:ext cx="7315200" cy="1188720"/>
+          </a:xfrm>
+          <a:prstGeom prst="rect">
+            <a:avLst/>
+          </a:prstGeom>
+          <a:noFill/>
+        </p:spPr>
+        <p:txBody>
+          <a:bodyPr wrap="square" anchor="t" lIns="0" rIns="0" tIns="0" bIns="0">
+            <a:spAutoFit/>
+          </a:bodyPr>
+          <a:lstStyle/>
+          <a:p>
+            <a:pPr algn="l">
+              <a:lnSpc>
+                <a:spcPct val="100000"/>
+              </a:lnSpc>
+            </a:pPr>
+            <a:r>
+              <a:rPr sz="4800" b="1" i="0">
+                <a:solidFill>
+                  <a:srgbClr val="FFFFFF"/>
+                </a:solidFill>
+                <a:latin typeface="Calibri"/>
+              </a:rPr>
+              <a:t>Gracias</a:t>
+            </a:r>
+          </a:p>
+        </p:txBody>
+      </p:sp>
+      <p:sp>
+        <p:nvSpPr>
+          <p:cNvPr id="5" name="TextBox 4"/>
+          <p:cNvSpPr txBox="1"/>
+          <p:nvPr/>
+        </p:nvSpPr>
+        <p:spPr>
+          <a:xfrm>
+            <a:off x="822960" y="3429000"/>
+            <a:ext cx="7315200" cy="548640"/>
+          </a:xfrm>
+          <a:prstGeom prst="rect">
+            <a:avLst/>
+          </a:prstGeom>
+          <a:noFill/>
+        </p:spPr>
+        <p:txBody>
+          <a:bodyPr wrap="square" anchor="t" lIns="0" rIns="0" tIns="0" bIns="0">
+            <a:spAutoFit/>
+          </a:bodyPr>
+          <a:lstStyle/>
+          <a:p>
+            <a:pPr algn="l">
+              <a:lnSpc>
+                <a:spcPct val="100000"/>
+              </a:lnSpc>
+            </a:pPr>
+            <a:r>
+              <a:rPr sz="1800" b="0" i="0">
+                <a:solidFill>
+                  <a:srgbClr val="B8C4D0"/>
+                </a:solidFill>
+                <a:latin typeface="Calibri"/>
+              </a:rPr>
+              <a:t>Preguntas y comentarios</a:t>
+            </a:r>
+          </a:p>
+        </p:txBody>
+      </p:sp>
+      <p:sp>
+        <p:nvSpPr>
+          <p:cNvPr id="6" name="TextBox 5"/>
+          <p:cNvSpPr txBox="1"/>
+          <p:nvPr/>
+        </p:nvSpPr>
+        <p:spPr>
+          <a:xfrm>
+            <a:off x="822960" y="6035040"/>
+            <a:ext cx="8229600" cy="365760"/>
+          </a:xfrm>
+          <a:prstGeom prst="rect">
+            <a:avLst/>
+          </a:prstGeom>
+          <a:noFill/>
+        </p:spPr>
+        <p:txBody>
+          <a:bodyPr wrap="square" anchor="t" lIns="0" rIns="0" tIns="0" bIns="0">
+            <a:spAutoFit/>
+          </a:bodyPr>
+          <a:lstStyle/>
+          <a:p>
+            <a:pPr algn="l">
+              <a:lnSpc>
+                <a:spcPct val="100000"/>
+              </a:lnSpc>
+            </a:pPr>
+            <a:r>
+              <a:rPr sz="1300" b="0" i="0">
+                <a:solidFill>
+                  <a:srgbClr val="2CA6A4"/>
+                </a:solidFill>
+                <a:latin typeface="Calibri"/>
+              </a:rPr>
+              <a:t>Repositorio: https://github.com/DufreyM/CC3084-Proyecto2</a:t>
             </a:r>
           </a:p>
         </p:txBody>
